--- a/scripts/steven/poster materials/poster_steven.pptx
+++ b/scripts/steven/poster materials/poster_steven.pptx
@@ -203,7 +203,7 @@
           <a:p>
             <a:fld id="{AAD9DA6F-FBF0-DF48-AC61-FDAD57D9A0A8}" type="datetimeFigureOut">
               <a:rPr lang="en-US" smtClean="0"/>
-              <a:t>4/17/26</a:t>
+              <a:t>4/27/26</a:t>
             </a:fld>
             <a:endParaRPr lang="en-US"/>
           </a:p>
@@ -757,7 +757,7 @@
           <a:p>
             <a:fld id="{0CB9E054-BB2E-5C48-9E53-8935A6C4B662}" type="datetimeFigureOut">
               <a:rPr lang="en-US" smtClean="0"/>
-              <a:t>4/17/26</a:t>
+              <a:t>4/27/26</a:t>
             </a:fld>
             <a:endParaRPr lang="en-US"/>
           </a:p>
@@ -927,7 +927,7 @@
           <a:p>
             <a:fld id="{0CB9E054-BB2E-5C48-9E53-8935A6C4B662}" type="datetimeFigureOut">
               <a:rPr lang="en-US" smtClean="0"/>
-              <a:t>4/17/26</a:t>
+              <a:t>4/27/26</a:t>
             </a:fld>
             <a:endParaRPr lang="en-US"/>
           </a:p>
@@ -1107,7 +1107,7 @@
           <a:p>
             <a:fld id="{0CB9E054-BB2E-5C48-9E53-8935A6C4B662}" type="datetimeFigureOut">
               <a:rPr lang="en-US" smtClean="0"/>
-              <a:t>4/17/26</a:t>
+              <a:t>4/27/26</a:t>
             </a:fld>
             <a:endParaRPr lang="en-US"/>
           </a:p>
@@ -1457,7 +1457,7 @@
           <a:p>
             <a:fld id="{0CB9E054-BB2E-5C48-9E53-8935A6C4B662}" type="datetimeFigureOut">
               <a:rPr lang="en-US" smtClean="0"/>
-              <a:t>4/17/26</a:t>
+              <a:t>4/27/26</a:t>
             </a:fld>
             <a:endParaRPr lang="en-US"/>
           </a:p>
@@ -1701,7 +1701,7 @@
           <a:p>
             <a:fld id="{0CB9E054-BB2E-5C48-9E53-8935A6C4B662}" type="datetimeFigureOut">
               <a:rPr lang="en-US" smtClean="0"/>
-              <a:t>4/17/26</a:t>
+              <a:t>4/27/26</a:t>
             </a:fld>
             <a:endParaRPr lang="en-US"/>
           </a:p>
@@ -1933,7 +1933,7 @@
           <a:p>
             <a:fld id="{0CB9E054-BB2E-5C48-9E53-8935A6C4B662}" type="datetimeFigureOut">
               <a:rPr lang="en-US" smtClean="0"/>
-              <a:t>4/17/26</a:t>
+              <a:t>4/27/26</a:t>
             </a:fld>
             <a:endParaRPr lang="en-US"/>
           </a:p>
@@ -2300,7 +2300,7 @@
           <a:p>
             <a:fld id="{0CB9E054-BB2E-5C48-9E53-8935A6C4B662}" type="datetimeFigureOut">
               <a:rPr lang="en-US" smtClean="0"/>
-              <a:t>4/17/26</a:t>
+              <a:t>4/27/26</a:t>
             </a:fld>
             <a:endParaRPr lang="en-US"/>
           </a:p>
@@ -2418,7 +2418,7 @@
           <a:p>
             <a:fld id="{0CB9E054-BB2E-5C48-9E53-8935A6C4B662}" type="datetimeFigureOut">
               <a:rPr lang="en-US" smtClean="0"/>
-              <a:t>4/17/26</a:t>
+              <a:t>4/27/26</a:t>
             </a:fld>
             <a:endParaRPr lang="en-US"/>
           </a:p>
@@ -2513,7 +2513,7 @@
           <a:p>
             <a:fld id="{0CB9E054-BB2E-5C48-9E53-8935A6C4B662}" type="datetimeFigureOut">
               <a:rPr lang="en-US" smtClean="0"/>
-              <a:t>4/17/26</a:t>
+              <a:t>4/27/26</a:t>
             </a:fld>
             <a:endParaRPr lang="en-US"/>
           </a:p>
@@ -2790,7 +2790,7 @@
           <a:p>
             <a:fld id="{0CB9E054-BB2E-5C48-9E53-8935A6C4B662}" type="datetimeFigureOut">
               <a:rPr lang="en-US" smtClean="0"/>
-              <a:t>4/17/26</a:t>
+              <a:t>4/27/26</a:t>
             </a:fld>
             <a:endParaRPr lang="en-US"/>
           </a:p>
@@ -3047,7 +3047,7 @@
           <a:p>
             <a:fld id="{0CB9E054-BB2E-5C48-9E53-8935A6C4B662}" type="datetimeFigureOut">
               <a:rPr lang="en-US" smtClean="0"/>
-              <a:t>4/17/26</a:t>
+              <a:t>4/27/26</a:t>
             </a:fld>
             <a:endParaRPr lang="en-US"/>
           </a:p>
@@ -3260,7 +3260,7 @@
           <a:p>
             <a:fld id="{0CB9E054-BB2E-5C48-9E53-8935A6C4B662}" type="datetimeFigureOut">
               <a:rPr lang="en-US" smtClean="0"/>
-              <a:t>4/17/26</a:t>
+              <a:t>4/27/26</a:t>
             </a:fld>
             <a:endParaRPr lang="en-US"/>
           </a:p>
@@ -3688,8 +3688,8 @@
         </p:nvSpPr>
         <p:spPr>
           <a:xfrm>
-            <a:off x="28963287" y="4486961"/>
-            <a:ext cx="14541399" cy="19738354"/>
+            <a:off x="28963287" y="4465798"/>
+            <a:ext cx="14680836" cy="19759516"/>
           </a:xfrm>
           <a:prstGeom prst="rect">
             <a:avLst/>
@@ -3829,8 +3829,8 @@
         </p:nvSpPr>
         <p:spPr>
           <a:xfrm>
-            <a:off x="13672800" y="4445790"/>
-            <a:ext cx="14794078" cy="27874630"/>
+            <a:off x="13875874" y="4465798"/>
+            <a:ext cx="14794078" cy="28187537"/>
           </a:xfrm>
           <a:prstGeom prst="rect">
             <a:avLst/>
@@ -3880,6 +3880,19 @@
             </a:endParaRPr>
           </a:p>
           <a:p>
+            <a:pPr>
+              <a:spcAft>
+                <a:spcPts val="1741"/>
+              </a:spcAft>
+            </a:pPr>
+            <a:endParaRPr lang="en-US" sz="4922" dirty="0">
+              <a:solidFill>
+                <a:srgbClr val="333333"/>
+              </a:solidFill>
+              <a:latin typeface="+mj-lt"/>
+            </a:endParaRPr>
+          </a:p>
+          <a:p>
             <a:pPr marL="207235" indent="-207235">
               <a:spcAft>
                 <a:spcPts val="1741"/>
@@ -3924,36 +3937,6 @@
               <a:latin typeface="+mj-lt"/>
             </a:endParaRPr>
           </a:p>
-          <a:p>
-            <a:pPr marL="207235" indent="-207235">
-              <a:spcAft>
-                <a:spcPts val="1741"/>
-              </a:spcAft>
-              <a:buFont typeface="Arial" panose="020B0604020202020204" pitchFamily="34" charset="0"/>
-              <a:buChar char="•"/>
-            </a:pPr>
-            <a:endParaRPr lang="en-US" sz="4922" dirty="0">
-              <a:solidFill>
-                <a:srgbClr val="333333"/>
-              </a:solidFill>
-              <a:latin typeface="+mj-lt"/>
-            </a:endParaRPr>
-          </a:p>
-          <a:p>
-            <a:pPr marL="207235" indent="-207235">
-              <a:spcAft>
-                <a:spcPts val="1741"/>
-              </a:spcAft>
-              <a:buFont typeface="Arial" panose="020B0604020202020204" pitchFamily="34" charset="0"/>
-              <a:buChar char="•"/>
-            </a:pPr>
-            <a:endParaRPr lang="en-US" sz="4922" dirty="0">
-              <a:solidFill>
-                <a:srgbClr val="333333"/>
-              </a:solidFill>
-              <a:latin typeface="+mj-lt"/>
-            </a:endParaRPr>
-          </a:p>
         </p:txBody>
       </p:sp>
       <p:sp>
@@ -3970,8 +3953,8 @@
         </p:nvSpPr>
         <p:spPr>
           <a:xfrm>
-            <a:off x="29218466" y="24460451"/>
-            <a:ext cx="14271208" cy="5419103"/>
+            <a:off x="28963287" y="24460451"/>
+            <a:ext cx="14680836" cy="5419103"/>
           </a:xfrm>
           <a:prstGeom prst="rect">
             <a:avLst/>
@@ -4021,72 +4004,10 @@
             </a:endParaRPr>
           </a:p>
           <a:p>
-            <a:pPr marL="207235" indent="-207235">
+            <a:pPr>
               <a:spcAft>
                 <a:spcPts val="1741"/>
               </a:spcAft>
-              <a:buFont typeface="Arial" panose="020B0604020202020204" pitchFamily="34" charset="0"/>
-              <a:buChar char="•"/>
-            </a:pPr>
-            <a:endParaRPr lang="en-US" sz="4922" dirty="0">
-              <a:solidFill>
-                <a:srgbClr val="333333"/>
-              </a:solidFill>
-              <a:latin typeface="+mj-lt"/>
-            </a:endParaRPr>
-          </a:p>
-          <a:p>
-            <a:pPr marL="207235" indent="-207235">
-              <a:spcAft>
-                <a:spcPts val="1741"/>
-              </a:spcAft>
-              <a:buFont typeface="Arial" panose="020B0604020202020204" pitchFamily="34" charset="0"/>
-              <a:buChar char="•"/>
-            </a:pPr>
-            <a:endParaRPr lang="en-US" sz="4922" dirty="0">
-              <a:solidFill>
-                <a:srgbClr val="333333"/>
-              </a:solidFill>
-              <a:latin typeface="+mj-lt"/>
-            </a:endParaRPr>
-          </a:p>
-          <a:p>
-            <a:pPr marL="207235" indent="-207235">
-              <a:spcAft>
-                <a:spcPts val="1741"/>
-              </a:spcAft>
-              <a:buFont typeface="Arial" panose="020B0604020202020204" pitchFamily="34" charset="0"/>
-              <a:buChar char="•"/>
-            </a:pPr>
-            <a:endParaRPr lang="en-US" sz="4922" dirty="0">
-              <a:solidFill>
-                <a:srgbClr val="333333"/>
-              </a:solidFill>
-              <a:latin typeface="+mj-lt"/>
-            </a:endParaRPr>
-          </a:p>
-          <a:p>
-            <a:pPr marL="207235" indent="-207235">
-              <a:spcAft>
-                <a:spcPts val="1741"/>
-              </a:spcAft>
-              <a:buFont typeface="Arial" panose="020B0604020202020204" pitchFamily="34" charset="0"/>
-              <a:buChar char="•"/>
-            </a:pPr>
-            <a:endParaRPr lang="en-US" sz="4922" dirty="0">
-              <a:solidFill>
-                <a:srgbClr val="333333"/>
-              </a:solidFill>
-              <a:latin typeface="+mj-lt"/>
-            </a:endParaRPr>
-          </a:p>
-          <a:p>
-            <a:pPr marL="207235" indent="-207235">
-              <a:spcAft>
-                <a:spcPts val="1741"/>
-              </a:spcAft>
-              <a:buFont typeface="Arial" panose="020B0604020202020204" pitchFamily="34" charset="0"/>
-              <a:buChar char="•"/>
             </a:pPr>
             <a:endParaRPr lang="en-US" sz="4922" dirty="0">
               <a:solidFill>
@@ -4111,7 +4032,7 @@
         </p:nvSpPr>
         <p:spPr>
           <a:xfrm>
-            <a:off x="654618" y="4613192"/>
+            <a:off x="235324" y="4465798"/>
             <a:ext cx="13323428" cy="7060889"/>
           </a:xfrm>
           <a:prstGeom prst="rect">
@@ -4252,8 +4173,8 @@
         </p:nvSpPr>
         <p:spPr>
           <a:xfrm>
-            <a:off x="-15905848" y="8483622"/>
-            <a:ext cx="13323428" cy="20793082"/>
+            <a:off x="247077" y="11769753"/>
+            <a:ext cx="13311675" cy="20793082"/>
           </a:xfrm>
           <a:prstGeom prst="rect">
             <a:avLst/>
@@ -4427,8 +4348,8 @@
         </p:nvSpPr>
         <p:spPr>
           <a:xfrm>
-            <a:off x="269650" y="417715"/>
-            <a:ext cx="39235130" cy="3046988"/>
+            <a:off x="313432" y="347328"/>
+            <a:ext cx="32181853" cy="2862322"/>
           </a:xfrm>
           <a:prstGeom prst="rect">
             <a:avLst/>
@@ -4445,7 +4366,7 @@
           <a:lstStyle/>
           <a:p>
             <a:r>
-              <a:rPr lang="en-US" sz="9600" b="1" dirty="0">
+              <a:rPr lang="en-US" sz="9000" b="1" dirty="0">
                 <a:solidFill>
                   <a:srgbClr val="ECE7E2"/>
                 </a:solidFill>
@@ -4453,120 +4374,7 @@
                 <a:ea typeface="Verdana" panose="020B0604030504040204" pitchFamily="34" charset="0"/>
                 <a:cs typeface="Calibri" panose="020F0502020204030204" pitchFamily="34" charset="0"/>
               </a:rPr>
-              <a:t>Size-specific drought vulnerability and growth strategies across three conifer species</a:t>
-            </a:r>
-          </a:p>
-        </p:txBody>
-      </p:sp>
-      <p:sp>
-        <p:nvSpPr>
-          <p:cNvPr id="80" name="TextBox 79">
-            <a:extLst>
-              <a:ext uri="{FF2B5EF4-FFF2-40B4-BE49-F238E27FC236}">
-                <a16:creationId xmlns:a16="http://schemas.microsoft.com/office/drawing/2014/main" id="{0B4F15D1-6EF3-4049-93B4-3035B9F53A19}"/>
-              </a:ext>
-            </a:extLst>
-          </p:cNvPr>
-          <p:cNvSpPr txBox="1"/>
-          <p:nvPr/>
-        </p:nvSpPr>
-        <p:spPr>
-          <a:xfrm>
-            <a:off x="960173" y="5603347"/>
-            <a:ext cx="11610060" cy="5760551"/>
-          </a:xfrm>
-          <a:prstGeom prst="rect">
-            <a:avLst/>
-          </a:prstGeom>
-          <a:noFill/>
-        </p:spPr>
-        <p:txBody>
-          <a:bodyPr wrap="square" rtlCol="0">
-            <a:spAutoFit/>
-          </a:bodyPr>
-          <a:lstStyle/>
-          <a:p>
-            <a:pPr marL="703219" indent="-703219">
-              <a:spcAft>
-                <a:spcPts val="1741"/>
-              </a:spcAft>
-              <a:buFont typeface="Arial" panose="020B0604020202020204" pitchFamily="34" charset="0"/>
-              <a:buChar char="•"/>
-            </a:pPr>
-            <a:r>
-              <a:rPr lang="en-US" sz="3400" dirty="0">
-                <a:solidFill>
-                  <a:schemeClr val="bg2">
-                    <a:lumMod val="25000"/>
-                  </a:schemeClr>
-                </a:solidFill>
-                <a:latin typeface="+mj-lt"/>
-              </a:rPr>
-              <a:t>Functional </a:t>
-            </a:r>
-            <a:r>
-              <a:rPr lang="en-US" sz="3400" b="0" i="0" u="none" strike="noStrike" dirty="0">
-                <a:solidFill>
-                  <a:schemeClr val="bg2">
-                    <a:lumMod val="25000"/>
-                  </a:schemeClr>
-                </a:solidFill>
-                <a:effectLst/>
-                <a:latin typeface="+mj-lt"/>
-              </a:rPr>
-              <a:t>traits offer insight into plant performance, species distributions, physiological processes, and demographic rates.</a:t>
-            </a:r>
-          </a:p>
-          <a:p>
-            <a:pPr marL="703219" indent="-703219">
-              <a:spcAft>
-                <a:spcPts val="1741"/>
-              </a:spcAft>
-              <a:buFont typeface="Arial" panose="020B0604020202020204" pitchFamily="34" charset="0"/>
-              <a:buChar char="•"/>
-            </a:pPr>
-            <a:r>
-              <a:rPr lang="en-US" sz="3400" dirty="0">
-                <a:solidFill>
-                  <a:schemeClr val="bg2">
-                    <a:lumMod val="25000"/>
-                  </a:schemeClr>
-                </a:solidFill>
-                <a:latin typeface="+mj-lt"/>
-              </a:rPr>
-              <a:t>How plant traits respond to environmental limitations to maintain growth/avoid stress are not well understood, especially across trees of different sizes that experience unique microclimates due to their canopy position and likely differ in water access due to variation in rooting depth. </a:t>
-            </a:r>
-          </a:p>
-          <a:p>
-            <a:pPr marL="703219" indent="-703219">
-              <a:spcAft>
-                <a:spcPts val="1741"/>
-              </a:spcAft>
-              <a:buFont typeface="Arial" panose="020B0604020202020204" pitchFamily="34" charset="0"/>
-              <a:buChar char="•"/>
-            </a:pPr>
-            <a:r>
-              <a:rPr lang="en-US" sz="3400" dirty="0">
-                <a:solidFill>
-                  <a:schemeClr val="bg2">
-                    <a:lumMod val="25000"/>
-                  </a:schemeClr>
-                </a:solidFill>
-                <a:latin typeface="+mj-lt"/>
-              </a:rPr>
-              <a:t>The </a:t>
-            </a:r>
-            <a:r>
-              <a:rPr lang="en-US" sz="3400" b="0" i="0" u="none" strike="noStrike" dirty="0">
-                <a:solidFill>
-                  <a:schemeClr val="bg2">
-                    <a:lumMod val="25000"/>
-                  </a:schemeClr>
-                </a:solidFill>
-                <a:effectLst/>
-                <a:latin typeface="+mj-lt"/>
-              </a:rPr>
-              <a:t>uncertainty about environmental variation and physiological response limits the utility of functional traits for use in management and modeling.</a:t>
+              <a:t>Quantifying leaf angle and its relationship to water availability from two California oak species</a:t>
             </a:r>
           </a:p>
         </p:txBody>
@@ -4586,7 +4394,7 @@
         <p:spPr>
           <a:xfrm>
             <a:off x="28963287" y="30151495"/>
-            <a:ext cx="14541399" cy="2501841"/>
+            <a:ext cx="14680836" cy="2501841"/>
           </a:xfrm>
           <a:prstGeom prst="rect">
             <a:avLst/>
@@ -4631,305 +4439,6 @@
                 <a:spcPts val="0"/>
               </a:spcAft>
             </a:pPr>
-            <a:r>
-              <a:rPr lang="da-DK" sz="2600" dirty="0">
-                <a:solidFill>
-                  <a:schemeClr val="bg2">
-                    <a:lumMod val="25000"/>
-                  </a:schemeClr>
-                </a:solidFill>
-                <a:effectLst/>
-                <a:latin typeface="+mj-lt"/>
-                <a:ea typeface="DengXian" panose="02010600030101010101" pitchFamily="2" charset="-122"/>
-                <a:cs typeface="Calibri" panose="020F0502020204030204" pitchFamily="34" charset="0"/>
-              </a:rPr>
-              <a:t>	</a:t>
-            </a:r>
-            <a:r>
-              <a:rPr lang="da-DK" sz="2600" dirty="0" err="1">
-                <a:solidFill>
-                  <a:schemeClr val="bg2">
-                    <a:lumMod val="25000"/>
-                  </a:schemeClr>
-                </a:solidFill>
-                <a:effectLst/>
-                <a:latin typeface="+mj-lt"/>
-                <a:ea typeface="DengXian" panose="02010600030101010101" pitchFamily="2" charset="-122"/>
-                <a:cs typeface="Calibri" panose="020F0502020204030204" pitchFamily="34" charset="0"/>
-              </a:rPr>
-              <a:t>Anderegg</a:t>
-            </a:r>
-            <a:r>
-              <a:rPr lang="da-DK" sz="2600" dirty="0">
-                <a:solidFill>
-                  <a:schemeClr val="bg2">
-                    <a:lumMod val="25000"/>
-                  </a:schemeClr>
-                </a:solidFill>
-                <a:effectLst/>
-                <a:latin typeface="+mj-lt"/>
-                <a:ea typeface="DengXian" panose="02010600030101010101" pitchFamily="2" charset="-122"/>
-                <a:cs typeface="Calibri" panose="020F0502020204030204" pitchFamily="34" charset="0"/>
-              </a:rPr>
-              <a:t>, L. D. L. (2023). </a:t>
-            </a:r>
-            <a:r>
-              <a:rPr lang="en-US" sz="2600" dirty="0">
-                <a:solidFill>
-                  <a:schemeClr val="bg2">
-                    <a:lumMod val="25000"/>
-                  </a:schemeClr>
-                </a:solidFill>
-                <a:effectLst/>
-                <a:latin typeface="+mj-lt"/>
-                <a:ea typeface="DengXian" panose="02010600030101010101" pitchFamily="2" charset="-122"/>
-                <a:cs typeface="Calibri" panose="020F0502020204030204" pitchFamily="34" charset="0"/>
-              </a:rPr>
-              <a:t>Why can’t we predict traits from the environment? </a:t>
-            </a:r>
-            <a:r>
-              <a:rPr lang="en-US" sz="2600" i="1" dirty="0">
-                <a:solidFill>
-                  <a:schemeClr val="bg2">
-                    <a:lumMod val="25000"/>
-                  </a:schemeClr>
-                </a:solidFill>
-                <a:effectLst/>
-                <a:latin typeface="+mj-lt"/>
-                <a:ea typeface="DengXian" panose="02010600030101010101" pitchFamily="2" charset="-122"/>
-                <a:cs typeface="Calibri" panose="020F0502020204030204" pitchFamily="34" charset="0"/>
-              </a:rPr>
-              <a:t>New Phytologist</a:t>
-            </a:r>
-            <a:r>
-              <a:rPr lang="en-US" sz="2600" dirty="0">
-                <a:solidFill>
-                  <a:schemeClr val="bg2">
-                    <a:lumMod val="25000"/>
-                  </a:schemeClr>
-                </a:solidFill>
-                <a:effectLst/>
-                <a:latin typeface="+mj-lt"/>
-                <a:ea typeface="DengXian" panose="02010600030101010101" pitchFamily="2" charset="-122"/>
-                <a:cs typeface="Calibri" panose="020F0502020204030204" pitchFamily="34" charset="0"/>
-              </a:rPr>
-              <a:t>, </a:t>
-            </a:r>
-            <a:r>
-              <a:rPr lang="en-US" sz="2600" i="1" dirty="0">
-                <a:solidFill>
-                  <a:schemeClr val="bg2">
-                    <a:lumMod val="25000"/>
-                  </a:schemeClr>
-                </a:solidFill>
-                <a:effectLst/>
-                <a:latin typeface="+mj-lt"/>
-                <a:ea typeface="DengXian" panose="02010600030101010101" pitchFamily="2" charset="-122"/>
-                <a:cs typeface="Calibri" panose="020F0502020204030204" pitchFamily="34" charset="0"/>
-              </a:rPr>
-              <a:t>237</a:t>
-            </a:r>
-            <a:r>
-              <a:rPr lang="en-US" sz="2600" dirty="0">
-                <a:solidFill>
-                  <a:schemeClr val="bg2">
-                    <a:lumMod val="25000"/>
-                  </a:schemeClr>
-                </a:solidFill>
-                <a:effectLst/>
-                <a:latin typeface="+mj-lt"/>
-                <a:ea typeface="DengXian" panose="02010600030101010101" pitchFamily="2" charset="-122"/>
-                <a:cs typeface="Calibri" panose="020F0502020204030204" pitchFamily="34" charset="0"/>
-              </a:rPr>
-              <a:t>(6), 1998–2004. </a:t>
-            </a:r>
-          </a:p>
-          <a:p>
-            <a:pPr marL="0" marR="0">
-              <a:spcBef>
-                <a:spcPts val="0"/>
-              </a:spcBef>
-              <a:spcAft>
-                <a:spcPts val="0"/>
-              </a:spcAft>
-            </a:pPr>
-            <a:r>
-              <a:rPr lang="de-DE" sz="2600" dirty="0">
-                <a:solidFill>
-                  <a:schemeClr val="bg2">
-                    <a:lumMod val="25000"/>
-                  </a:schemeClr>
-                </a:solidFill>
-                <a:effectLst/>
-                <a:latin typeface="+mj-lt"/>
-                <a:ea typeface="DengXian" panose="02010600030101010101" pitchFamily="2" charset="-122"/>
-                <a:cs typeface="Calibri" panose="020F0502020204030204" pitchFamily="34" charset="0"/>
-              </a:rPr>
-              <a:t>	Das, A. J., Stephenson, N. L., &amp; Davis, K. P. (2016). </a:t>
-            </a:r>
-            <a:r>
-              <a:rPr lang="en-US" sz="2600" dirty="0">
-                <a:solidFill>
-                  <a:schemeClr val="bg2">
-                    <a:lumMod val="25000"/>
-                  </a:schemeClr>
-                </a:solidFill>
-                <a:effectLst/>
-                <a:latin typeface="+mj-lt"/>
-                <a:ea typeface="DengXian" panose="02010600030101010101" pitchFamily="2" charset="-122"/>
-                <a:cs typeface="Calibri" panose="020F0502020204030204" pitchFamily="34" charset="0"/>
-              </a:rPr>
-              <a:t>Why do trees die? Characterizing the drivers of background tree mortality. </a:t>
-            </a:r>
-            <a:r>
-              <a:rPr lang="en-US" sz="2600" i="1" dirty="0">
-                <a:solidFill>
-                  <a:schemeClr val="bg2">
-                    <a:lumMod val="25000"/>
-                  </a:schemeClr>
-                </a:solidFill>
-                <a:effectLst/>
-                <a:latin typeface="+mj-lt"/>
-                <a:ea typeface="DengXian" panose="02010600030101010101" pitchFamily="2" charset="-122"/>
-                <a:cs typeface="Calibri" panose="020F0502020204030204" pitchFamily="34" charset="0"/>
-              </a:rPr>
-              <a:t>Ecology</a:t>
-            </a:r>
-            <a:r>
-              <a:rPr lang="en-US" sz="2600" dirty="0">
-                <a:solidFill>
-                  <a:schemeClr val="bg2">
-                    <a:lumMod val="25000"/>
-                  </a:schemeClr>
-                </a:solidFill>
-                <a:effectLst/>
-                <a:latin typeface="+mj-lt"/>
-                <a:ea typeface="DengXian" panose="02010600030101010101" pitchFamily="2" charset="-122"/>
-                <a:cs typeface="Calibri" panose="020F0502020204030204" pitchFamily="34" charset="0"/>
-              </a:rPr>
-              <a:t>, </a:t>
-            </a:r>
-            <a:r>
-              <a:rPr lang="en-US" sz="2600" i="1" dirty="0">
-                <a:solidFill>
-                  <a:schemeClr val="bg2">
-                    <a:lumMod val="25000"/>
-                  </a:schemeClr>
-                </a:solidFill>
-                <a:effectLst/>
-                <a:latin typeface="+mj-lt"/>
-                <a:ea typeface="DengXian" panose="02010600030101010101" pitchFamily="2" charset="-122"/>
-                <a:cs typeface="Calibri" panose="020F0502020204030204" pitchFamily="34" charset="0"/>
-              </a:rPr>
-              <a:t>97</a:t>
-            </a:r>
-            <a:r>
-              <a:rPr lang="en-US" sz="2600" dirty="0">
-                <a:solidFill>
-                  <a:schemeClr val="bg2">
-                    <a:lumMod val="25000"/>
-                  </a:schemeClr>
-                </a:solidFill>
-                <a:effectLst/>
-                <a:latin typeface="+mj-lt"/>
-                <a:ea typeface="DengXian" panose="02010600030101010101" pitchFamily="2" charset="-122"/>
-                <a:cs typeface="Calibri" panose="020F0502020204030204" pitchFamily="34" charset="0"/>
-              </a:rPr>
-              <a:t>(10), 2616–2627. 	</a:t>
-            </a:r>
-          </a:p>
-          <a:p>
-            <a:pPr marL="0" marR="0">
-              <a:spcBef>
-                <a:spcPts val="0"/>
-              </a:spcBef>
-              <a:spcAft>
-                <a:spcPts val="0"/>
-              </a:spcAft>
-            </a:pPr>
-            <a:r>
-              <a:rPr lang="en-US" sz="2600" dirty="0">
-                <a:solidFill>
-                  <a:schemeClr val="bg2">
-                    <a:lumMod val="25000"/>
-                  </a:schemeClr>
-                </a:solidFill>
-                <a:latin typeface="+mj-lt"/>
-                <a:ea typeface="DengXian" panose="02010600030101010101" pitchFamily="2" charset="-122"/>
-                <a:cs typeface="Calibri" panose="020F0502020204030204" pitchFamily="34" charset="0"/>
-              </a:rPr>
-              <a:t>	</a:t>
-            </a:r>
-            <a:r>
-              <a:rPr lang="en-US" sz="2600" dirty="0">
-                <a:solidFill>
-                  <a:schemeClr val="bg2">
-                    <a:lumMod val="25000"/>
-                  </a:schemeClr>
-                </a:solidFill>
-                <a:effectLst/>
-                <a:latin typeface="+mj-lt"/>
-                <a:ea typeface="DengXian" panose="02010600030101010101" pitchFamily="2" charset="-122"/>
-                <a:cs typeface="Calibri" panose="020F0502020204030204" pitchFamily="34" charset="0"/>
-              </a:rPr>
-              <a:t>Trugman, A. T., Anderegg, L. D. L., Anderegg, W. R. L., Das, A. J., &amp; Stephenson, N. L. (2021). Why is Tree Drought Mortality so Hard to Predict? </a:t>
-            </a:r>
-            <a:r>
-              <a:rPr lang="en-US" sz="2600" i="1" dirty="0">
-                <a:solidFill>
-                  <a:schemeClr val="bg2">
-                    <a:lumMod val="25000"/>
-                  </a:schemeClr>
-                </a:solidFill>
-                <a:effectLst/>
-                <a:latin typeface="+mj-lt"/>
-                <a:ea typeface="DengXian" panose="02010600030101010101" pitchFamily="2" charset="-122"/>
-                <a:cs typeface="Calibri" panose="020F0502020204030204" pitchFamily="34" charset="0"/>
-              </a:rPr>
-              <a:t>Trends in Ecology &amp; Evolution</a:t>
-            </a:r>
-            <a:r>
-              <a:rPr lang="en-US" sz="2600" dirty="0">
-                <a:solidFill>
-                  <a:schemeClr val="bg2">
-                    <a:lumMod val="25000"/>
-                  </a:schemeClr>
-                </a:solidFill>
-                <a:effectLst/>
-                <a:latin typeface="+mj-lt"/>
-                <a:ea typeface="DengXian" panose="02010600030101010101" pitchFamily="2" charset="-122"/>
-                <a:cs typeface="Calibri" panose="020F0502020204030204" pitchFamily="34" charset="0"/>
-              </a:rPr>
-              <a:t>, </a:t>
-            </a:r>
-            <a:r>
-              <a:rPr lang="en-US" sz="2600" i="1" dirty="0">
-                <a:solidFill>
-                  <a:schemeClr val="bg2">
-                    <a:lumMod val="25000"/>
-                  </a:schemeClr>
-                </a:solidFill>
-                <a:effectLst/>
-                <a:latin typeface="+mj-lt"/>
-                <a:ea typeface="DengXian" panose="02010600030101010101" pitchFamily="2" charset="-122"/>
-                <a:cs typeface="Calibri" panose="020F0502020204030204" pitchFamily="34" charset="0"/>
-              </a:rPr>
-              <a:t>36</a:t>
-            </a:r>
-            <a:r>
-              <a:rPr lang="en-US" sz="2600" dirty="0">
-                <a:solidFill>
-                  <a:schemeClr val="bg2">
-                    <a:lumMod val="25000"/>
-                  </a:schemeClr>
-                </a:solidFill>
-                <a:effectLst/>
-                <a:latin typeface="+mj-lt"/>
-                <a:ea typeface="DengXian" panose="02010600030101010101" pitchFamily="2" charset="-122"/>
-                <a:cs typeface="Calibri" panose="020F0502020204030204" pitchFamily="34" charset="0"/>
-              </a:rPr>
-              <a:t>(6), 520–532. </a:t>
-            </a:r>
             <a:endParaRPr lang="en-US" sz="2600" b="1" dirty="0">
               <a:solidFill>
                 <a:schemeClr val="bg2">
@@ -4955,7 +4464,7 @@
         </p:nvSpPr>
         <p:spPr>
           <a:xfrm>
-            <a:off x="32963192" y="4557246"/>
+            <a:off x="33050931" y="4613775"/>
             <a:ext cx="6541588" cy="1015663"/>
           </a:xfrm>
           <a:prstGeom prst="rect">
@@ -4999,7 +4508,7 @@
         </p:nvSpPr>
         <p:spPr>
           <a:xfrm>
-            <a:off x="2409758" y="14038998"/>
+            <a:off x="2603852" y="11874315"/>
             <a:ext cx="8974561" cy="1015663"/>
           </a:xfrm>
           <a:prstGeom prst="rect">
@@ -5024,178 +4533,8 @@
                   <a:srgbClr val="284655"/>
                 </a:solidFill>
               </a:rPr>
-              <a:t>Questions/Hypotheses</a:t>
-            </a:r>
-          </a:p>
-        </p:txBody>
-      </p:sp>
-      <p:pic>
-        <p:nvPicPr>
-          <p:cNvPr id="17" name="Graphic 16" descr="Books with solid fill">
-            <a:extLst>
-              <a:ext uri="{FF2B5EF4-FFF2-40B4-BE49-F238E27FC236}">
-                <a16:creationId xmlns:a16="http://schemas.microsoft.com/office/drawing/2014/main" id="{52B97F07-A011-27E4-A99C-8B8E1956D74B}"/>
-              </a:ext>
-            </a:extLst>
-          </p:cNvPr>
-          <p:cNvPicPr>
-            <a:picLocks noChangeAspect="1"/>
-          </p:cNvPicPr>
-          <p:nvPr/>
-        </p:nvPicPr>
-        <p:blipFill>
-          <a:blip r:embed="rId3">
-            <a:extLst>
-              <a:ext uri="{96DAC541-7B7A-43D3-8B79-37D633B846F1}">
-                <asvg:svgBlip xmlns:asvg="http://schemas.microsoft.com/office/drawing/2016/SVG/main" r:embed="rId4"/>
-              </a:ext>
-            </a:extLst>
-          </a:blip>
-          <a:stretch>
-            <a:fillRect/>
-          </a:stretch>
-        </p:blipFill>
-        <p:spPr>
-          <a:xfrm>
-            <a:off x="401527" y="4477970"/>
-            <a:ext cx="1300602" cy="1321451"/>
-          </a:xfrm>
-          <a:prstGeom prst="rect">
-            <a:avLst/>
-          </a:prstGeom>
-        </p:spPr>
-      </p:pic>
-      <p:pic>
-        <p:nvPicPr>
-          <p:cNvPr id="19" name="Graphic 18" descr="Boot with solid fill">
-            <a:extLst>
-              <a:ext uri="{FF2B5EF4-FFF2-40B4-BE49-F238E27FC236}">
-                <a16:creationId xmlns:a16="http://schemas.microsoft.com/office/drawing/2014/main" id="{FCC06FAC-7311-9197-FF8B-0F296DD02583}"/>
-              </a:ext>
-            </a:extLst>
-          </p:cNvPr>
-          <p:cNvPicPr>
-            <a:picLocks noChangeAspect="1"/>
-          </p:cNvPicPr>
-          <p:nvPr/>
-        </p:nvPicPr>
-        <p:blipFill>
-          <a:blip r:embed="rId5">
-            <a:extLst>
-              <a:ext uri="{96DAC541-7B7A-43D3-8B79-37D633B846F1}">
-                <asvg:svgBlip xmlns:asvg="http://schemas.microsoft.com/office/drawing/2016/SVG/main" r:embed="rId6"/>
-              </a:ext>
-            </a:extLst>
-          </a:blip>
-          <a:stretch>
-            <a:fillRect/>
-          </a:stretch>
-        </p:blipFill>
-        <p:spPr>
-          <a:xfrm>
-            <a:off x="38803" y="14546829"/>
-            <a:ext cx="1286982" cy="1286982"/>
-          </a:xfrm>
-          <a:prstGeom prst="rect">
-            <a:avLst/>
-          </a:prstGeom>
-        </p:spPr>
-      </p:pic>
-      <p:sp>
-        <p:nvSpPr>
-          <p:cNvPr id="24" name="TextBox 23">
-            <a:extLst>
-              <a:ext uri="{FF2B5EF4-FFF2-40B4-BE49-F238E27FC236}">
-                <a16:creationId xmlns:a16="http://schemas.microsoft.com/office/drawing/2014/main" id="{99B2611D-AC40-CCBD-AF5A-4249606EBBC9}"/>
-              </a:ext>
-            </a:extLst>
-          </p:cNvPr>
-          <p:cNvSpPr txBox="1"/>
-          <p:nvPr/>
-        </p:nvSpPr>
-        <p:spPr>
-          <a:xfrm rot="16200000">
-            <a:off x="11386948" y="19439545"/>
-            <a:ext cx="6366754" cy="1015663"/>
-          </a:xfrm>
-          <a:prstGeom prst="rect">
-            <a:avLst/>
-          </a:prstGeom>
-          <a:noFill/>
-        </p:spPr>
-        <p:txBody>
-          <a:bodyPr wrap="square" rtlCol="0">
-            <a:spAutoFit/>
-          </a:bodyPr>
-          <a:lstStyle/>
-          <a:p>
-            <a:pPr algn="ctr">
-              <a:spcAft>
-                <a:spcPts val="1741"/>
-              </a:spcAft>
-            </a:pPr>
-            <a:r>
-              <a:rPr lang="en-US" sz="6000" b="1" dirty="0">
-                <a:solidFill>
-                  <a:srgbClr val="284655"/>
-                </a:solidFill>
-              </a:rPr>
-              <a:t>Water Potentials</a:t>
-            </a:r>
-            <a:endParaRPr lang="en-US" sz="4400" b="1" dirty="0">
-              <a:solidFill>
-                <a:srgbClr val="284655"/>
-              </a:solidFill>
-            </a:endParaRPr>
-          </a:p>
-        </p:txBody>
-      </p:sp>
-      <p:sp>
-        <p:nvSpPr>
-          <p:cNvPr id="39" name="TextBox 38">
-            <a:extLst>
-              <a:ext uri="{FF2B5EF4-FFF2-40B4-BE49-F238E27FC236}">
-                <a16:creationId xmlns:a16="http://schemas.microsoft.com/office/drawing/2014/main" id="{9BFB2D60-AC1A-4B67-C121-0417A286B126}"/>
-              </a:ext>
-            </a:extLst>
-          </p:cNvPr>
-          <p:cNvSpPr txBox="1"/>
-          <p:nvPr/>
-        </p:nvSpPr>
-        <p:spPr>
-          <a:xfrm rot="16200000">
-            <a:off x="12147920" y="8593364"/>
-            <a:ext cx="6366756" cy="1938992"/>
-          </a:xfrm>
-          <a:prstGeom prst="rect">
-            <a:avLst/>
-          </a:prstGeom>
-          <a:noFill/>
-        </p:spPr>
-        <p:txBody>
-          <a:bodyPr wrap="square" rtlCol="0">
-            <a:spAutoFit/>
-          </a:bodyPr>
-          <a:lstStyle/>
-          <a:p>
-            <a:pPr algn="ctr">
-              <a:spcAft>
-                <a:spcPts val="1741"/>
-              </a:spcAft>
-            </a:pPr>
-            <a:r>
-              <a:rPr lang="en-US" sz="6000" b="1" dirty="0">
-                <a:solidFill>
-                  <a:srgbClr val="284655"/>
-                </a:solidFill>
-              </a:rPr>
-              <a:t>Leaf Angle Methods</a:t>
-            </a:r>
-            <a:endParaRPr lang="en-US" sz="4400" b="1" dirty="0">
-              <a:solidFill>
-                <a:srgbClr val="284655"/>
-              </a:solidFill>
-            </a:endParaRPr>
+              <a:t>QUESTIONS/HYPOTHESES:</a:t>
+            </a:r>
           </a:p>
         </p:txBody>
       </p:sp>
@@ -5291,10 +4630,10 @@
       </p:sp>
       <p:sp>
         <p:nvSpPr>
-          <p:cNvPr id="137" name="TextBox 136">
+          <p:cNvPr id="169" name="TextBox 168">
             <a:extLst>
               <a:ext uri="{FF2B5EF4-FFF2-40B4-BE49-F238E27FC236}">
-                <a16:creationId xmlns:a16="http://schemas.microsoft.com/office/drawing/2014/main" id="{6C26A3DC-58C0-C3A2-DA2C-4522F9108AE9}"/>
+                <a16:creationId xmlns:a16="http://schemas.microsoft.com/office/drawing/2014/main" id="{7B0E8398-C137-4C79-C265-B4C5611B1E6D}"/>
               </a:ext>
             </a:extLst>
           </p:cNvPr>
@@ -5303,8 +4642,60 @@
         </p:nvSpPr>
         <p:spPr>
           <a:xfrm>
-            <a:off x="15199437" y="28622524"/>
-            <a:ext cx="13187526" cy="1815882"/>
+            <a:off x="3820339" y="4498158"/>
+            <a:ext cx="6541588" cy="1133837"/>
+          </a:xfrm>
+          <a:prstGeom prst="rect">
+            <a:avLst/>
+          </a:prstGeom>
+          <a:noFill/>
+        </p:spPr>
+        <p:txBody>
+          <a:bodyPr wrap="square" rtlCol="0">
+            <a:spAutoFit/>
+          </a:bodyPr>
+          <a:lstStyle/>
+          <a:p>
+            <a:pPr algn="ctr">
+              <a:spcAft>
+                <a:spcPts val="1741"/>
+              </a:spcAft>
+            </a:pPr>
+            <a:r>
+              <a:rPr lang="en-US" sz="6000" b="1" dirty="0">
+                <a:solidFill>
+                  <a:srgbClr val="284655"/>
+                </a:solidFill>
+              </a:rPr>
+              <a:t>BACKGROUND</a:t>
+            </a:r>
+            <a:r>
+              <a:rPr lang="en-US" sz="6768" b="1" dirty="0">
+                <a:solidFill>
+                  <a:srgbClr val="284655"/>
+                </a:solidFill>
+              </a:rPr>
+              <a:t>:</a:t>
+            </a:r>
+          </a:p>
+        </p:txBody>
+      </p:sp>
+      <p:sp>
+        <p:nvSpPr>
+          <p:cNvPr id="141" name="TextBox 140">
+            <a:extLst>
+              <a:ext uri="{FF2B5EF4-FFF2-40B4-BE49-F238E27FC236}">
+                <a16:creationId xmlns:a16="http://schemas.microsoft.com/office/drawing/2014/main" id="{15AD9329-DCFA-2667-EEE0-05988447A873}"/>
+              </a:ext>
+            </a:extLst>
+          </p:cNvPr>
+          <p:cNvSpPr txBox="1"/>
+          <p:nvPr/>
+        </p:nvSpPr>
+        <p:spPr>
+          <a:xfrm>
+            <a:off x="29147669" y="24560890"/>
+            <a:ext cx="6695231" cy="784830"/>
           </a:xfrm>
           <a:prstGeom prst="rect">
             <a:avLst/>
@@ -5323,94 +4714,152 @@
               </a:spcAft>
             </a:pPr>
             <a:r>
-              <a:rPr lang="en-US" sz="2800" dirty="0">
+              <a:rPr lang="en-US" sz="4500" b="1" dirty="0">
+                <a:solidFill>
+                  <a:srgbClr val="ECE7E2"/>
+                </a:solidFill>
+                <a:latin typeface="Times New Roman" panose="02020603050405020304" pitchFamily="18" charset="0"/>
+                <a:cs typeface="Times New Roman" panose="02020603050405020304" pitchFamily="18" charset="0"/>
+              </a:rPr>
+              <a:t>CONCLUSION</a:t>
+            </a:r>
+            <a:r>
+              <a:rPr lang="en-US" sz="4500" b="1" dirty="0">
+                <a:solidFill>
+                  <a:srgbClr val="ECE7E2"/>
+                </a:solidFill>
+              </a:rPr>
+              <a:t>:</a:t>
+            </a:r>
+          </a:p>
+        </p:txBody>
+      </p:sp>
+      <p:sp>
+        <p:nvSpPr>
+          <p:cNvPr id="82" name="TextBox 81">
+            <a:extLst>
+              <a:ext uri="{FF2B5EF4-FFF2-40B4-BE49-F238E27FC236}">
+                <a16:creationId xmlns:a16="http://schemas.microsoft.com/office/drawing/2014/main" id="{72321696-FCE6-3742-8D12-C5EDED447AFD}"/>
+              </a:ext>
+            </a:extLst>
+          </p:cNvPr>
+          <p:cNvSpPr txBox="1"/>
+          <p:nvPr/>
+        </p:nvSpPr>
+        <p:spPr>
+          <a:xfrm>
+            <a:off x="18680711" y="4613775"/>
+            <a:ext cx="5184404" cy="1015663"/>
+          </a:xfrm>
+          <a:prstGeom prst="rect">
+            <a:avLst/>
+          </a:prstGeom>
+          <a:noFill/>
+        </p:spPr>
+        <p:txBody>
+          <a:bodyPr wrap="square" rtlCol="0">
+            <a:spAutoFit/>
+          </a:bodyPr>
+          <a:lstStyle/>
+          <a:p>
+            <a:pPr algn="ctr">
+              <a:spcAft>
+                <a:spcPts val="1741"/>
+              </a:spcAft>
+            </a:pPr>
+            <a:r>
+              <a:rPr lang="en-US" sz="6000" b="1" dirty="0">
                 <a:solidFill>
                   <a:schemeClr val="bg2">
                     <a:lumMod val="25000"/>
                   </a:schemeClr>
                 </a:solidFill>
-                <a:latin typeface="+mj-lt"/>
               </a:rPr>
-              <a:t>Fig. 4. Variation in end of season leaf area to sapwood area ratio across trees of different size classes and at different sites (means +/- </a:t>
-            </a:r>
-            <a:r>
-              <a:rPr lang="en-US" sz="2800" dirty="0" err="1">
-                <a:solidFill>
-                  <a:schemeClr val="bg2">
-                    <a:lumMod val="25000"/>
-                  </a:schemeClr>
-                </a:solidFill>
-                <a:latin typeface="+mj-lt"/>
-              </a:rPr>
-              <a:t>sd</a:t>
-            </a:r>
-            <a:r>
-              <a:rPr lang="en-US" sz="2800" dirty="0">
-                <a:solidFill>
-                  <a:schemeClr val="bg2">
-                    <a:lumMod val="25000"/>
-                  </a:schemeClr>
-                </a:solidFill>
-                <a:latin typeface="+mj-lt"/>
-              </a:rPr>
-              <a:t>). Al:As measured in 5-8 trees of each size class per site in August 2023. Significant differences indicated in upper left corner (no sig. differences for CADE, or across size classes at a given site for any species).</a:t>
-            </a:r>
-          </a:p>
-        </p:txBody>
-      </p:sp>
-      <p:pic>
-        <p:nvPicPr>
-          <p:cNvPr id="1040" name="Picture 16">
+              <a:t>METHODS:</a:t>
+            </a:r>
+            <a:endParaRPr lang="en-US" sz="4400" b="1" dirty="0">
+              <a:solidFill>
+                <a:schemeClr val="bg2">
+                  <a:lumMod val="25000"/>
+                </a:schemeClr>
+              </a:solidFill>
+            </a:endParaRPr>
+          </a:p>
+        </p:txBody>
+      </p:sp>
+      <p:sp>
+        <p:nvSpPr>
+          <p:cNvPr id="239" name="TextBox 238">
             <a:extLst>
               <a:ext uri="{FF2B5EF4-FFF2-40B4-BE49-F238E27FC236}">
-                <a16:creationId xmlns:a16="http://schemas.microsoft.com/office/drawing/2014/main" id="{8FBE4B96-BAA1-06B8-EA71-FD9FB48B676B}"/>
+                <a16:creationId xmlns:a16="http://schemas.microsoft.com/office/drawing/2014/main" id="{D000B35B-295E-3964-A67F-416DDF8C39DF}"/>
               </a:ext>
             </a:extLst>
           </p:cNvPr>
-          <p:cNvPicPr>
-            <a:picLocks noChangeAspect="1" noChangeArrowheads="1"/>
-          </p:cNvPicPr>
+          <p:cNvSpPr txBox="1"/>
           <p:nvPr/>
-        </p:nvPicPr>
-        <p:blipFill>
-          <a:blip r:embed="rId7">
-            <a:extLst>
-              <a:ext uri="{28A0092B-C50C-407E-A947-70E740481C1C}">
-                <a14:useLocalDpi xmlns:a14="http://schemas.microsoft.com/office/drawing/2010/main" val="0"/>
-              </a:ext>
-            </a:extLst>
-          </a:blip>
-          <a:srcRect/>
-          <a:stretch>
-            <a:fillRect/>
-          </a:stretch>
-        </p:blipFill>
-        <p:spPr bwMode="auto">
-          <a:xfrm>
-            <a:off x="40749020" y="418400"/>
-            <a:ext cx="3227467" cy="2420599"/>
+        </p:nvSpPr>
+        <p:spPr>
+          <a:xfrm>
+            <a:off x="315012" y="3128023"/>
+            <a:ext cx="28481367" cy="1785104"/>
           </a:xfrm>
           <a:prstGeom prst="rect">
             <a:avLst/>
           </a:prstGeom>
           <a:noFill/>
-          <a:extLst>
-            <a:ext uri="{909E8E84-426E-40DD-AFC4-6F175D3DCCD1}">
-              <a14:hiddenFill xmlns:a14="http://schemas.microsoft.com/office/drawing/2010/main">
+        </p:spPr>
+        <p:txBody>
+          <a:bodyPr wrap="square" rtlCol="0">
+            <a:spAutoFit/>
+          </a:bodyPr>
+          <a:lstStyle/>
+          <a:p>
+            <a:r>
+              <a:rPr lang="en-US" sz="5000" b="1" dirty="0">
                 <a:solidFill>
-                  <a:srgbClr val="FFFFFF"/>
+                  <a:srgbClr val="ECE7E2"/>
                 </a:solidFill>
-              </a14:hiddenFill>
-            </a:ext>
-          </a:extLst>
-        </p:spPr>
-      </p:pic>
+                <a:latin typeface="+mj-lt"/>
+                <a:ea typeface="Verdana" panose="020B0604030504040204" pitchFamily="34" charset="0"/>
+                <a:cs typeface="Calibri" panose="020F0502020204030204" pitchFamily="34" charset="0"/>
+              </a:rPr>
+              <a:t>Steven Le, Indra </a:t>
+            </a:r>
+            <a:r>
+              <a:rPr lang="en-US" sz="5000" b="1" dirty="0" err="1">
+                <a:solidFill>
+                  <a:srgbClr val="ECE7E2"/>
+                </a:solidFill>
+                <a:latin typeface="+mj-lt"/>
+                <a:ea typeface="Verdana" panose="020B0604030504040204" pitchFamily="34" charset="0"/>
+                <a:cs typeface="Calibri" panose="020F0502020204030204" pitchFamily="34" charset="0"/>
+              </a:rPr>
+              <a:t>Boving</a:t>
+            </a:r>
+            <a:r>
+              <a:rPr lang="en-US" sz="5000" b="1" dirty="0">
+                <a:solidFill>
+                  <a:srgbClr val="ECE7E2"/>
+                </a:solidFill>
+                <a:latin typeface="+mj-lt"/>
+                <a:ea typeface="Verdana" panose="020B0604030504040204" pitchFamily="34" charset="0"/>
+                <a:cs typeface="Calibri" panose="020F0502020204030204" pitchFamily="34" charset="0"/>
+              </a:rPr>
+              <a:t>, Leander Anderegg</a:t>
+            </a:r>
+          </a:p>
+          <a:p>
+            <a:endParaRPr lang="en-US" sz="6000" dirty="0"/>
+          </a:p>
+        </p:txBody>
+      </p:sp>
       <p:pic>
         <p:nvPicPr>
-          <p:cNvPr id="160" name="Graphic 159" descr="Forest scene with solid fill">
+          <p:cNvPr id="9" name="Picture 8" descr="A blue circle with a book and a star&#10;&#10;AI-generated content may be incorrect.">
             <a:extLst>
               <a:ext uri="{FF2B5EF4-FFF2-40B4-BE49-F238E27FC236}">
-                <a16:creationId xmlns:a16="http://schemas.microsoft.com/office/drawing/2014/main" id="{6504FE88-7D04-7272-58A8-91379F0F07DD}"/>
+                <a16:creationId xmlns:a16="http://schemas.microsoft.com/office/drawing/2014/main" id="{7DF575A2-B584-46A5-595B-CF95AAE64E5F}"/>
               </a:ext>
             </a:extLst>
           </p:cNvPr>
@@ -5420,1299 +4869,27 @@
           <p:nvPr/>
         </p:nvPicPr>
         <p:blipFill>
-          <a:blip r:embed="rId8">
-            <a:extLst>
-              <a:ext uri="{96DAC541-7B7A-43D3-8B79-37D633B846F1}">
-                <asvg:svgBlip xmlns:asvg="http://schemas.microsoft.com/office/drawing/2016/SVG/main" r:embed="rId9"/>
-              </a:ext>
-            </a:extLst>
-          </a:blip>
+          <a:blip r:embed="rId3"/>
           <a:stretch>
             <a:fillRect/>
           </a:stretch>
         </p:blipFill>
         <p:spPr>
           <a:xfrm>
-            <a:off x="29035367" y="4445790"/>
-            <a:ext cx="1363592" cy="1363592"/>
+            <a:off x="40062139" y="486873"/>
+            <a:ext cx="3514049" cy="3514049"/>
           </a:xfrm>
           <a:prstGeom prst="rect">
             <a:avLst/>
           </a:prstGeom>
         </p:spPr>
       </p:pic>
-      <p:sp>
-        <p:nvSpPr>
-          <p:cNvPr id="168" name="TextBox 167">
+      <p:pic>
+        <p:nvPicPr>
+          <p:cNvPr id="11" name="Picture 10" descr="A logo of a mountain and a planet&#10;&#10;AI-generated content may be incorrect.">
             <a:extLst>
               <a:ext uri="{FF2B5EF4-FFF2-40B4-BE49-F238E27FC236}">
-                <a16:creationId xmlns:a16="http://schemas.microsoft.com/office/drawing/2014/main" id="{C25395FF-928B-BD87-088C-A63E929FDBD9}"/>
-              </a:ext>
-            </a:extLst>
-          </p:cNvPr>
-          <p:cNvSpPr txBox="1"/>
-          <p:nvPr/>
-        </p:nvSpPr>
-        <p:spPr>
-          <a:xfrm>
-            <a:off x="32495285" y="6282969"/>
-            <a:ext cx="6366754" cy="5632311"/>
-          </a:xfrm>
-          <a:prstGeom prst="rect">
-            <a:avLst/>
-          </a:prstGeom>
-          <a:noFill/>
-        </p:spPr>
-        <p:txBody>
-          <a:bodyPr wrap="square" rtlCol="0">
-            <a:spAutoFit/>
-          </a:bodyPr>
-          <a:lstStyle/>
-          <a:p>
-            <a:pPr algn="ctr">
-              <a:spcAft>
-                <a:spcPts val="1741"/>
-              </a:spcAft>
-            </a:pPr>
-            <a:r>
-              <a:rPr lang="en-US" sz="6000" b="1" dirty="0">
-                <a:solidFill>
-                  <a:srgbClr val="284655"/>
-                </a:solidFill>
-              </a:rPr>
-              <a:t>Mean and standard deviation of leaf angles for the two species (boxplot of species angles size by side</a:t>
-            </a:r>
-            <a:endParaRPr lang="en-US" sz="4400" b="1" dirty="0">
-              <a:solidFill>
-                <a:srgbClr val="284655"/>
-              </a:solidFill>
-            </a:endParaRPr>
-          </a:p>
-        </p:txBody>
-      </p:sp>
-      <p:sp>
-        <p:nvSpPr>
-          <p:cNvPr id="169" name="TextBox 168">
-            <a:extLst>
-              <a:ext uri="{FF2B5EF4-FFF2-40B4-BE49-F238E27FC236}">
-                <a16:creationId xmlns:a16="http://schemas.microsoft.com/office/drawing/2014/main" id="{7B0E8398-C137-4C79-C265-B4C5611B1E6D}"/>
-              </a:ext>
-            </a:extLst>
-          </p:cNvPr>
-          <p:cNvSpPr txBox="1"/>
-          <p:nvPr/>
-        </p:nvSpPr>
-        <p:spPr>
-          <a:xfrm>
-            <a:off x="3767003" y="4451941"/>
-            <a:ext cx="6541588" cy="1133837"/>
-          </a:xfrm>
-          <a:prstGeom prst="rect">
-            <a:avLst/>
-          </a:prstGeom>
-          <a:noFill/>
-        </p:spPr>
-        <p:txBody>
-          <a:bodyPr wrap="square" rtlCol="0">
-            <a:spAutoFit/>
-          </a:bodyPr>
-          <a:lstStyle/>
-          <a:p>
-            <a:pPr algn="ctr">
-              <a:spcAft>
-                <a:spcPts val="1741"/>
-              </a:spcAft>
-            </a:pPr>
-            <a:r>
-              <a:rPr lang="en-US" sz="6000" b="1" dirty="0">
-                <a:solidFill>
-                  <a:srgbClr val="284655"/>
-                </a:solidFill>
-              </a:rPr>
-              <a:t>BACKGROUND</a:t>
-            </a:r>
-            <a:r>
-              <a:rPr lang="en-US" sz="6768" b="1" dirty="0">
-                <a:solidFill>
-                  <a:srgbClr val="284655"/>
-                </a:solidFill>
-              </a:rPr>
-              <a:t>:</a:t>
-            </a:r>
-          </a:p>
-        </p:txBody>
-      </p:sp>
-      <p:sp>
-        <p:nvSpPr>
-          <p:cNvPr id="207" name="TextBox 206">
-            <a:extLst>
-              <a:ext uri="{FF2B5EF4-FFF2-40B4-BE49-F238E27FC236}">
-                <a16:creationId xmlns:a16="http://schemas.microsoft.com/office/drawing/2014/main" id="{CB12464D-604D-89D5-9FA9-8F1DF3BC84FC}"/>
-              </a:ext>
-            </a:extLst>
-          </p:cNvPr>
-          <p:cNvSpPr txBox="1"/>
-          <p:nvPr/>
-        </p:nvSpPr>
-        <p:spPr>
-          <a:xfrm rot="16200000">
-            <a:off x="-1428534" y="29026984"/>
-            <a:ext cx="4626650" cy="1006963"/>
-          </a:xfrm>
-          <a:prstGeom prst="rect">
-            <a:avLst/>
-          </a:prstGeom>
-          <a:noFill/>
-        </p:spPr>
-        <p:txBody>
-          <a:bodyPr wrap="square" rtlCol="0">
-            <a:spAutoFit/>
-          </a:bodyPr>
-          <a:lstStyle/>
-          <a:p>
-            <a:pPr algn="ctr">
-              <a:spcAft>
-                <a:spcPts val="1741"/>
-              </a:spcAft>
-            </a:pPr>
-            <a:r>
-              <a:rPr lang="en-US" sz="6000" b="1" dirty="0">
-                <a:solidFill>
-                  <a:srgbClr val="284655"/>
-                </a:solidFill>
-              </a:rPr>
-              <a:t>Traits</a:t>
-            </a:r>
-            <a:endParaRPr lang="en-US" sz="4400" b="1" dirty="0">
-              <a:solidFill>
-                <a:srgbClr val="284655"/>
-              </a:solidFill>
-            </a:endParaRPr>
-          </a:p>
-        </p:txBody>
-      </p:sp>
-      <p:graphicFrame>
-        <p:nvGraphicFramePr>
-          <p:cNvPr id="209" name="Table 208">
-            <a:extLst>
-              <a:ext uri="{FF2B5EF4-FFF2-40B4-BE49-F238E27FC236}">
-                <a16:creationId xmlns:a16="http://schemas.microsoft.com/office/drawing/2014/main" id="{B1577E9A-1C06-BF67-062B-EFEE0618784C}"/>
-              </a:ext>
-            </a:extLst>
-          </p:cNvPr>
-          <p:cNvGraphicFramePr>
-            <a:graphicFrameLocks noGrp="1"/>
-          </p:cNvGraphicFramePr>
-          <p:nvPr>
-            <p:extLst>
-              <p:ext uri="{D42A27DB-BD31-4B8C-83A1-F6EECF244321}">
-                <p14:modId xmlns:p14="http://schemas.microsoft.com/office/powerpoint/2010/main" val="2939880601"/>
-              </p:ext>
-            </p:extLst>
-          </p:nvPr>
-        </p:nvGraphicFramePr>
-        <p:xfrm>
-          <a:off x="1766312" y="27036304"/>
-          <a:ext cx="11504150" cy="5109749"/>
-        </p:xfrm>
-        <a:graphic>
-          <a:graphicData uri="http://schemas.openxmlformats.org/drawingml/2006/table">
-            <a:tbl>
-              <a:tblPr/>
-              <a:tblGrid>
-                <a:gridCol w="2352524">
-                  <a:extLst>
-                    <a:ext uri="{9D8B030D-6E8A-4147-A177-3AD203B41FA5}">
-                      <a16:colId xmlns:a16="http://schemas.microsoft.com/office/drawing/2014/main" val="1412469433"/>
-                    </a:ext>
-                  </a:extLst>
-                </a:gridCol>
-                <a:gridCol w="9151626">
-                  <a:extLst>
-                    <a:ext uri="{9D8B030D-6E8A-4147-A177-3AD203B41FA5}">
-                      <a16:colId xmlns:a16="http://schemas.microsoft.com/office/drawing/2014/main" val="2389129855"/>
-                    </a:ext>
-                  </a:extLst>
-                </a:gridCol>
-              </a:tblGrid>
-              <a:tr h="498155">
-                <a:tc>
-                  <a:txBody>
-                    <a:bodyPr/>
-                    <a:lstStyle/>
-                    <a:p>
-                      <a:pPr rtl="0" fontAlgn="t">
-                        <a:spcBef>
-                          <a:spcPts val="0"/>
-                        </a:spcBef>
-                        <a:spcAft>
-                          <a:spcPts val="0"/>
-                        </a:spcAft>
-                      </a:pPr>
-                      <a:r>
-                        <a:rPr lang="en-US" sz="3200" b="1" i="0" u="none" strike="noStrike" dirty="0">
-                          <a:solidFill>
-                            <a:srgbClr val="000000"/>
-                          </a:solidFill>
-                          <a:effectLst/>
-                          <a:latin typeface="+mj-lt"/>
-                        </a:rPr>
-                        <a:t>   Variables</a:t>
-                      </a:r>
-                      <a:endParaRPr lang="en-US" sz="3200" dirty="0">
-                        <a:effectLst/>
-                        <a:latin typeface="+mj-lt"/>
-                      </a:endParaRPr>
-                    </a:p>
-                  </a:txBody>
-                  <a:tcPr marL="57150" marR="57150" marT="95250" marB="28575">
-                    <a:lnL w="9525" cap="flat" cmpd="sng" algn="ctr">
-                      <a:solidFill>
-                        <a:srgbClr val="9E9E9E"/>
-                      </a:solidFill>
-                      <a:prstDash val="solid"/>
-                      <a:round/>
-                      <a:headEnd type="none" w="med" len="med"/>
-                      <a:tailEnd type="none" w="med" len="med"/>
-                    </a:lnL>
-                    <a:lnR w="9525" cap="flat" cmpd="sng" algn="ctr">
-                      <a:solidFill>
-                        <a:srgbClr val="9E9E9E"/>
-                      </a:solidFill>
-                      <a:prstDash val="solid"/>
-                      <a:round/>
-                      <a:headEnd type="none" w="med" len="med"/>
-                      <a:tailEnd type="none" w="med" len="med"/>
-                    </a:lnR>
-                    <a:lnT w="9525" cap="flat" cmpd="sng" algn="ctr">
-                      <a:solidFill>
-                        <a:srgbClr val="9E9E9E"/>
-                      </a:solidFill>
-                      <a:prstDash val="solid"/>
-                      <a:round/>
-                      <a:headEnd type="none" w="med" len="med"/>
-                      <a:tailEnd type="none" w="med" len="med"/>
-                    </a:lnT>
-                    <a:lnB w="9525" cap="flat" cmpd="sng" algn="ctr">
-                      <a:solidFill>
-                        <a:srgbClr val="000000"/>
-                      </a:solidFill>
-                      <a:prstDash val="solid"/>
-                      <a:round/>
-                      <a:headEnd type="none" w="med" len="med"/>
-                      <a:tailEnd type="none" w="med" len="med"/>
-                    </a:lnB>
-                  </a:tcPr>
-                </a:tc>
-                <a:tc>
-                  <a:txBody>
-                    <a:bodyPr/>
-                    <a:lstStyle/>
-                    <a:p>
-                      <a:pPr algn="ctr" rtl="0" fontAlgn="t">
-                        <a:spcBef>
-                          <a:spcPts val="0"/>
-                        </a:spcBef>
-                        <a:spcAft>
-                          <a:spcPts val="0"/>
-                        </a:spcAft>
-                      </a:pPr>
-                      <a:r>
-                        <a:rPr lang="en-US" sz="3200" b="1" i="0" u="none" strike="noStrike" dirty="0">
-                          <a:solidFill>
-                            <a:srgbClr val="000000"/>
-                          </a:solidFill>
-                          <a:effectLst/>
-                          <a:latin typeface="+mj-lt"/>
-                        </a:rPr>
-                        <a:t>Definition</a:t>
-                      </a:r>
-                      <a:endParaRPr lang="en-US" sz="3200" dirty="0">
-                        <a:effectLst/>
-                        <a:latin typeface="+mj-lt"/>
-                      </a:endParaRPr>
-                    </a:p>
-                  </a:txBody>
-                  <a:tcPr marL="57150" marR="57150" marT="95250" marB="28575">
-                    <a:lnL w="9525" cap="flat" cmpd="sng" algn="ctr">
-                      <a:solidFill>
-                        <a:srgbClr val="9E9E9E"/>
-                      </a:solidFill>
-                      <a:prstDash val="solid"/>
-                      <a:round/>
-                      <a:headEnd type="none" w="med" len="med"/>
-                      <a:tailEnd type="none" w="med" len="med"/>
-                    </a:lnL>
-                    <a:lnR w="9525" cap="flat" cmpd="sng" algn="ctr">
-                      <a:solidFill>
-                        <a:srgbClr val="9E9E9E"/>
-                      </a:solidFill>
-                      <a:prstDash val="solid"/>
-                      <a:round/>
-                      <a:headEnd type="none" w="med" len="med"/>
-                      <a:tailEnd type="none" w="med" len="med"/>
-                    </a:lnR>
-                    <a:lnT w="9525" cap="flat" cmpd="sng" algn="ctr">
-                      <a:solidFill>
-                        <a:srgbClr val="9E9E9E"/>
-                      </a:solidFill>
-                      <a:prstDash val="solid"/>
-                      <a:round/>
-                      <a:headEnd type="none" w="med" len="med"/>
-                      <a:tailEnd type="none" w="med" len="med"/>
-                    </a:lnT>
-                    <a:lnB w="9525" cap="flat" cmpd="sng" algn="ctr">
-                      <a:solidFill>
-                        <a:srgbClr val="000000"/>
-                      </a:solidFill>
-                      <a:prstDash val="solid"/>
-                      <a:round/>
-                      <a:headEnd type="none" w="med" len="med"/>
-                      <a:tailEnd type="none" w="med" len="med"/>
-                    </a:lnB>
-                  </a:tcPr>
-                </a:tc>
-                <a:extLst>
-                  <a:ext uri="{0D108BD9-81ED-4DB2-BD59-A6C34878D82A}">
-                    <a16:rowId xmlns:a16="http://schemas.microsoft.com/office/drawing/2014/main" val="876560309"/>
-                  </a:ext>
-                </a:extLst>
-              </a:tr>
-              <a:tr h="467264">
-                <a:tc>
-                  <a:txBody>
-                    <a:bodyPr/>
-                    <a:lstStyle/>
-                    <a:p>
-                      <a:pPr rtl="0" fontAlgn="t">
-                        <a:spcBef>
-                          <a:spcPts val="0"/>
-                        </a:spcBef>
-                        <a:spcAft>
-                          <a:spcPts val="0"/>
-                        </a:spcAft>
-                      </a:pPr>
-                      <a:r>
-                        <a:rPr lang="en-US" sz="2800" b="0" i="0" u="none" strike="noStrike" dirty="0" err="1">
-                          <a:solidFill>
-                            <a:srgbClr val="000000"/>
-                          </a:solidFill>
-                          <a:effectLst/>
-                          <a:latin typeface="+mj-lt"/>
-                        </a:rPr>
-                        <a:t>knative</a:t>
-                      </a:r>
-                      <a:endParaRPr lang="en-US" sz="2800" dirty="0">
-                        <a:effectLst/>
-                        <a:latin typeface="+mj-lt"/>
-                      </a:endParaRPr>
-                    </a:p>
-                  </a:txBody>
-                  <a:tcPr marL="57150" marR="57150" marT="19050" marB="19050">
-                    <a:lnL w="9525" cap="flat" cmpd="sng" algn="ctr">
-                      <a:solidFill>
-                        <a:srgbClr val="9E9E9E"/>
-                      </a:solidFill>
-                      <a:prstDash val="solid"/>
-                      <a:round/>
-                      <a:headEnd type="none" w="med" len="med"/>
-                      <a:tailEnd type="none" w="med" len="med"/>
-                    </a:lnL>
-                    <a:lnR w="9525" cap="flat" cmpd="sng" algn="ctr">
-                      <a:solidFill>
-                        <a:srgbClr val="9E9E9E"/>
-                      </a:solidFill>
-                      <a:prstDash val="solid"/>
-                      <a:round/>
-                      <a:headEnd type="none" w="med" len="med"/>
-                      <a:tailEnd type="none" w="med" len="med"/>
-                    </a:lnR>
-                    <a:lnT w="9525" cap="flat" cmpd="sng" algn="ctr">
-                      <a:solidFill>
-                        <a:srgbClr val="000000"/>
-                      </a:solidFill>
-                      <a:prstDash val="solid"/>
-                      <a:round/>
-                      <a:headEnd type="none" w="med" len="med"/>
-                      <a:tailEnd type="none" w="med" len="med"/>
-                    </a:lnT>
-                    <a:lnB w="9525" cap="flat" cmpd="sng" algn="ctr">
-                      <a:solidFill>
-                        <a:srgbClr val="9E9E9E"/>
-                      </a:solidFill>
-                      <a:prstDash val="solid"/>
-                      <a:round/>
-                      <a:headEnd type="none" w="med" len="med"/>
-                      <a:tailEnd type="none" w="med" len="med"/>
-                    </a:lnB>
-                  </a:tcPr>
-                </a:tc>
-                <a:tc>
-                  <a:txBody>
-                    <a:bodyPr/>
-                    <a:lstStyle/>
-                    <a:p>
-                      <a:pPr marL="0" algn="l" defTabSz="4389120" rtl="0" eaLnBrk="1" fontAlgn="t" latinLnBrk="0" hangingPunct="1">
-                        <a:spcBef>
-                          <a:spcPts val="0"/>
-                        </a:spcBef>
-                        <a:spcAft>
-                          <a:spcPts val="0"/>
-                        </a:spcAft>
-                      </a:pPr>
-                      <a:r>
-                        <a:rPr lang="en-US" sz="2800" dirty="0">
-                          <a:effectLst/>
-                          <a:latin typeface="+mj-lt"/>
-                        </a:rPr>
-                        <a:t>Hydraulic conductivity; water movement through stems</a:t>
-                      </a:r>
-                    </a:p>
-                  </a:txBody>
-                  <a:tcPr marL="57150" marR="57150" marT="19050" marB="19050">
-                    <a:lnL w="9525" cap="flat" cmpd="sng" algn="ctr">
-                      <a:solidFill>
-                        <a:srgbClr val="9E9E9E"/>
-                      </a:solidFill>
-                      <a:prstDash val="solid"/>
-                      <a:round/>
-                      <a:headEnd type="none" w="med" len="med"/>
-                      <a:tailEnd type="none" w="med" len="med"/>
-                    </a:lnL>
-                    <a:lnR w="9525" cap="flat" cmpd="sng" algn="ctr">
-                      <a:solidFill>
-                        <a:srgbClr val="9E9E9E"/>
-                      </a:solidFill>
-                      <a:prstDash val="solid"/>
-                      <a:round/>
-                      <a:headEnd type="none" w="med" len="med"/>
-                      <a:tailEnd type="none" w="med" len="med"/>
-                    </a:lnR>
-                    <a:lnT w="9525" cap="flat" cmpd="sng" algn="ctr">
-                      <a:solidFill>
-                        <a:srgbClr val="000000"/>
-                      </a:solidFill>
-                      <a:prstDash val="solid"/>
-                      <a:round/>
-                      <a:headEnd type="none" w="med" len="med"/>
-                      <a:tailEnd type="none" w="med" len="med"/>
-                    </a:lnT>
-                    <a:lnB w="9525" cap="flat" cmpd="sng" algn="ctr">
-                      <a:solidFill>
-                        <a:srgbClr val="9E9E9E"/>
-                      </a:solidFill>
-                      <a:prstDash val="solid"/>
-                      <a:round/>
-                      <a:headEnd type="none" w="med" len="med"/>
-                      <a:tailEnd type="none" w="med" len="med"/>
-                    </a:lnB>
-                  </a:tcPr>
-                </a:tc>
-                <a:extLst>
-                  <a:ext uri="{0D108BD9-81ED-4DB2-BD59-A6C34878D82A}">
-                    <a16:rowId xmlns:a16="http://schemas.microsoft.com/office/drawing/2014/main" val="3565318891"/>
-                  </a:ext>
-                </a:extLst>
-              </a:tr>
-              <a:tr h="518176">
-                <a:tc>
-                  <a:txBody>
-                    <a:bodyPr/>
-                    <a:lstStyle/>
-                    <a:p>
-                      <a:pPr rtl="0" fontAlgn="t">
-                        <a:spcBef>
-                          <a:spcPts val="0"/>
-                        </a:spcBef>
-                        <a:spcAft>
-                          <a:spcPts val="0"/>
-                        </a:spcAft>
-                      </a:pPr>
-                      <a:r>
-                        <a:rPr lang="en-US" sz="2800" b="0" i="0" u="none" strike="noStrike" dirty="0">
-                          <a:solidFill>
-                            <a:srgbClr val="000000"/>
-                          </a:solidFill>
-                          <a:effectLst/>
-                          <a:latin typeface="+mj-lt"/>
-                        </a:rPr>
-                        <a:t>Transpirative drop</a:t>
-                      </a:r>
-                      <a:endParaRPr lang="en-US" sz="2800" dirty="0">
-                        <a:effectLst/>
-                        <a:latin typeface="+mj-lt"/>
-                      </a:endParaRPr>
-                    </a:p>
-                  </a:txBody>
-                  <a:tcPr marL="57150" marR="57150" marT="19050" marB="19050">
-                    <a:lnL w="9525" cap="flat" cmpd="sng" algn="ctr">
-                      <a:solidFill>
-                        <a:srgbClr val="9E9E9E"/>
-                      </a:solidFill>
-                      <a:prstDash val="solid"/>
-                      <a:round/>
-                      <a:headEnd type="none" w="med" len="med"/>
-                      <a:tailEnd type="none" w="med" len="med"/>
-                    </a:lnL>
-                    <a:lnR w="9525" cap="flat" cmpd="sng" algn="ctr">
-                      <a:solidFill>
-                        <a:srgbClr val="9E9E9E"/>
-                      </a:solidFill>
-                      <a:prstDash val="solid"/>
-                      <a:round/>
-                      <a:headEnd type="none" w="med" len="med"/>
-                      <a:tailEnd type="none" w="med" len="med"/>
-                    </a:lnR>
-                    <a:lnT w="9525" cap="flat" cmpd="sng" algn="ctr">
-                      <a:solidFill>
-                        <a:srgbClr val="9E9E9E"/>
-                      </a:solidFill>
-                      <a:prstDash val="solid"/>
-                      <a:round/>
-                      <a:headEnd type="none" w="med" len="med"/>
-                      <a:tailEnd type="none" w="med" len="med"/>
-                    </a:lnT>
-                    <a:lnB w="9525" cap="flat" cmpd="sng" algn="ctr">
-                      <a:solidFill>
-                        <a:srgbClr val="9E9E9E"/>
-                      </a:solidFill>
-                      <a:prstDash val="solid"/>
-                      <a:round/>
-                      <a:headEnd type="none" w="med" len="med"/>
-                      <a:tailEnd type="none" w="med" len="med"/>
-                    </a:lnB>
-                  </a:tcPr>
-                </a:tc>
-                <a:tc>
-                  <a:txBody>
-                    <a:bodyPr/>
-                    <a:lstStyle/>
-                    <a:p>
-                      <a:pPr marL="0" algn="l" defTabSz="4389120" rtl="0" eaLnBrk="1" fontAlgn="t" latinLnBrk="0" hangingPunct="1">
-                        <a:spcBef>
-                          <a:spcPts val="0"/>
-                        </a:spcBef>
-                        <a:spcAft>
-                          <a:spcPts val="0"/>
-                        </a:spcAft>
-                      </a:pPr>
-                      <a:r>
-                        <a:rPr lang="en-US" sz="2800" dirty="0">
-                          <a:effectLst/>
-                          <a:latin typeface="+mj-lt"/>
-                        </a:rPr>
-                        <a:t>Difference between predawn and midday water potential, indicates stomatal openness a evaporative demand</a:t>
-                      </a:r>
-                    </a:p>
-                  </a:txBody>
-                  <a:tcPr marL="57150" marR="57150" marT="19050" marB="19050">
-                    <a:lnL w="9525" cap="flat" cmpd="sng" algn="ctr">
-                      <a:solidFill>
-                        <a:srgbClr val="9E9E9E"/>
-                      </a:solidFill>
-                      <a:prstDash val="solid"/>
-                      <a:round/>
-                      <a:headEnd type="none" w="med" len="med"/>
-                      <a:tailEnd type="none" w="med" len="med"/>
-                    </a:lnL>
-                    <a:lnR w="9525" cap="flat" cmpd="sng" algn="ctr">
-                      <a:solidFill>
-                        <a:srgbClr val="9E9E9E"/>
-                      </a:solidFill>
-                      <a:prstDash val="solid"/>
-                      <a:round/>
-                      <a:headEnd type="none" w="med" len="med"/>
-                      <a:tailEnd type="none" w="med" len="med"/>
-                    </a:lnR>
-                    <a:lnT w="9525" cap="flat" cmpd="sng" algn="ctr">
-                      <a:solidFill>
-                        <a:srgbClr val="9E9E9E"/>
-                      </a:solidFill>
-                      <a:prstDash val="solid"/>
-                      <a:round/>
-                      <a:headEnd type="none" w="med" len="med"/>
-                      <a:tailEnd type="none" w="med" len="med"/>
-                    </a:lnT>
-                    <a:lnB w="9525" cap="flat" cmpd="sng" algn="ctr">
-                      <a:solidFill>
-                        <a:srgbClr val="9E9E9E"/>
-                      </a:solidFill>
-                      <a:prstDash val="solid"/>
-                      <a:round/>
-                      <a:headEnd type="none" w="med" len="med"/>
-                      <a:tailEnd type="none" w="med" len="med"/>
-                    </a:lnB>
-                  </a:tcPr>
-                </a:tc>
-                <a:extLst>
-                  <a:ext uri="{0D108BD9-81ED-4DB2-BD59-A6C34878D82A}">
-                    <a16:rowId xmlns:a16="http://schemas.microsoft.com/office/drawing/2014/main" val="1437525254"/>
-                  </a:ext>
-                </a:extLst>
-              </a:tr>
-              <a:tr h="642266">
-                <a:tc>
-                  <a:txBody>
-                    <a:bodyPr/>
-                    <a:lstStyle/>
-                    <a:p>
-                      <a:pPr rtl="0" fontAlgn="t">
-                        <a:spcBef>
-                          <a:spcPts val="0"/>
-                        </a:spcBef>
-                        <a:spcAft>
-                          <a:spcPts val="0"/>
-                        </a:spcAft>
-                      </a:pPr>
-                      <a:r>
-                        <a:rPr lang="en-US" sz="2800" b="0" i="0" u="none" strike="noStrike">
-                          <a:solidFill>
-                            <a:srgbClr val="000000"/>
-                          </a:solidFill>
-                          <a:effectLst/>
-                          <a:latin typeface="+mj-lt"/>
-                        </a:rPr>
-                        <a:t>Al:As</a:t>
-                      </a:r>
-                      <a:endParaRPr lang="en-US" sz="2800">
-                        <a:effectLst/>
-                        <a:latin typeface="+mj-lt"/>
-                      </a:endParaRPr>
-                    </a:p>
-                  </a:txBody>
-                  <a:tcPr marL="57150" marR="57150" marT="19050" marB="19050">
-                    <a:lnL w="9525" cap="flat" cmpd="sng" algn="ctr">
-                      <a:solidFill>
-                        <a:srgbClr val="9E9E9E"/>
-                      </a:solidFill>
-                      <a:prstDash val="solid"/>
-                      <a:round/>
-                      <a:headEnd type="none" w="med" len="med"/>
-                      <a:tailEnd type="none" w="med" len="med"/>
-                    </a:lnL>
-                    <a:lnR w="9525" cap="flat" cmpd="sng" algn="ctr">
-                      <a:solidFill>
-                        <a:srgbClr val="9E9E9E"/>
-                      </a:solidFill>
-                      <a:prstDash val="solid"/>
-                      <a:round/>
-                      <a:headEnd type="none" w="med" len="med"/>
-                      <a:tailEnd type="none" w="med" len="med"/>
-                    </a:lnR>
-                    <a:lnT w="9525" cap="flat" cmpd="sng" algn="ctr">
-                      <a:solidFill>
-                        <a:srgbClr val="9E9E9E"/>
-                      </a:solidFill>
-                      <a:prstDash val="solid"/>
-                      <a:round/>
-                      <a:headEnd type="none" w="med" len="med"/>
-                      <a:tailEnd type="none" w="med" len="med"/>
-                    </a:lnT>
-                    <a:lnB w="9525" cap="flat" cmpd="sng" algn="ctr">
-                      <a:solidFill>
-                        <a:srgbClr val="9E9E9E"/>
-                      </a:solidFill>
-                      <a:prstDash val="solid"/>
-                      <a:round/>
-                      <a:headEnd type="none" w="med" len="med"/>
-                      <a:tailEnd type="none" w="med" len="med"/>
-                    </a:lnB>
-                  </a:tcPr>
-                </a:tc>
-                <a:tc>
-                  <a:txBody>
-                    <a:bodyPr/>
-                    <a:lstStyle/>
-                    <a:p>
-                      <a:pPr marL="0" algn="l" defTabSz="4389120" rtl="0" eaLnBrk="1" fontAlgn="t" latinLnBrk="0" hangingPunct="1">
-                        <a:spcBef>
-                          <a:spcPts val="0"/>
-                        </a:spcBef>
-                        <a:spcAft>
-                          <a:spcPts val="0"/>
-                        </a:spcAft>
-                      </a:pPr>
-                      <a:r>
-                        <a:rPr lang="en-US" sz="2800" dirty="0">
-                          <a:effectLst/>
-                          <a:latin typeface="+mj-lt"/>
-                        </a:rPr>
-                        <a:t>Leaf area to sapwood area ratio; indicates allocation to photosynthesis vs. water supply to leaves</a:t>
-                      </a:r>
-                    </a:p>
-                  </a:txBody>
-                  <a:tcPr marL="57150" marR="57150" marT="19050" marB="19050">
-                    <a:lnL w="9525" cap="flat" cmpd="sng" algn="ctr">
-                      <a:solidFill>
-                        <a:srgbClr val="9E9E9E"/>
-                      </a:solidFill>
-                      <a:prstDash val="solid"/>
-                      <a:round/>
-                      <a:headEnd type="none" w="med" len="med"/>
-                      <a:tailEnd type="none" w="med" len="med"/>
-                    </a:lnL>
-                    <a:lnR w="9525" cap="flat" cmpd="sng" algn="ctr">
-                      <a:solidFill>
-                        <a:srgbClr val="9E9E9E"/>
-                      </a:solidFill>
-                      <a:prstDash val="solid"/>
-                      <a:round/>
-                      <a:headEnd type="none" w="med" len="med"/>
-                      <a:tailEnd type="none" w="med" len="med"/>
-                    </a:lnR>
-                    <a:lnT w="9525" cap="flat" cmpd="sng" algn="ctr">
-                      <a:solidFill>
-                        <a:srgbClr val="9E9E9E"/>
-                      </a:solidFill>
-                      <a:prstDash val="solid"/>
-                      <a:round/>
-                      <a:headEnd type="none" w="med" len="med"/>
-                      <a:tailEnd type="none" w="med" len="med"/>
-                    </a:lnT>
-                    <a:lnB w="9525" cap="flat" cmpd="sng" algn="ctr">
-                      <a:solidFill>
-                        <a:srgbClr val="9E9E9E"/>
-                      </a:solidFill>
-                      <a:prstDash val="solid"/>
-                      <a:round/>
-                      <a:headEnd type="none" w="med" len="med"/>
-                      <a:tailEnd type="none" w="med" len="med"/>
-                    </a:lnB>
-                  </a:tcPr>
-                </a:tc>
-                <a:extLst>
-                  <a:ext uri="{0D108BD9-81ED-4DB2-BD59-A6C34878D82A}">
-                    <a16:rowId xmlns:a16="http://schemas.microsoft.com/office/drawing/2014/main" val="820361624"/>
-                  </a:ext>
-                </a:extLst>
-              </a:tr>
-              <a:tr h="438481">
-                <a:tc>
-                  <a:txBody>
-                    <a:bodyPr/>
-                    <a:lstStyle/>
-                    <a:p>
-                      <a:pPr rtl="0" fontAlgn="t">
-                        <a:spcBef>
-                          <a:spcPts val="0"/>
-                        </a:spcBef>
-                        <a:spcAft>
-                          <a:spcPts val="0"/>
-                        </a:spcAft>
-                      </a:pPr>
-                      <a:r>
-                        <a:rPr lang="en-US" sz="2800" b="0" i="0" u="none" strike="noStrike">
-                          <a:solidFill>
-                            <a:srgbClr val="000000"/>
-                          </a:solidFill>
-                          <a:effectLst/>
-                          <a:latin typeface="+mj-lt"/>
-                        </a:rPr>
-                        <a:t>LMA</a:t>
-                      </a:r>
-                      <a:endParaRPr lang="en-US" sz="2800">
-                        <a:effectLst/>
-                        <a:latin typeface="+mj-lt"/>
-                      </a:endParaRPr>
-                    </a:p>
-                  </a:txBody>
-                  <a:tcPr marL="57150" marR="57150" marT="19050" marB="19050">
-                    <a:lnL w="9525" cap="flat" cmpd="sng" algn="ctr">
-                      <a:solidFill>
-                        <a:srgbClr val="9E9E9E"/>
-                      </a:solidFill>
-                      <a:prstDash val="solid"/>
-                      <a:round/>
-                      <a:headEnd type="none" w="med" len="med"/>
-                      <a:tailEnd type="none" w="med" len="med"/>
-                    </a:lnL>
-                    <a:lnR w="9525" cap="flat" cmpd="sng" algn="ctr">
-                      <a:solidFill>
-                        <a:srgbClr val="9E9E9E"/>
-                      </a:solidFill>
-                      <a:prstDash val="solid"/>
-                      <a:round/>
-                      <a:headEnd type="none" w="med" len="med"/>
-                      <a:tailEnd type="none" w="med" len="med"/>
-                    </a:lnR>
-                    <a:lnT w="9525" cap="flat" cmpd="sng" algn="ctr">
-                      <a:solidFill>
-                        <a:srgbClr val="9E9E9E"/>
-                      </a:solidFill>
-                      <a:prstDash val="solid"/>
-                      <a:round/>
-                      <a:headEnd type="none" w="med" len="med"/>
-                      <a:tailEnd type="none" w="med" len="med"/>
-                    </a:lnT>
-                    <a:lnB w="9525" cap="flat" cmpd="sng" algn="ctr">
-                      <a:solidFill>
-                        <a:srgbClr val="9E9E9E"/>
-                      </a:solidFill>
-                      <a:prstDash val="solid"/>
-                      <a:round/>
-                      <a:headEnd type="none" w="med" len="med"/>
-                      <a:tailEnd type="none" w="med" len="med"/>
-                    </a:lnB>
-                  </a:tcPr>
-                </a:tc>
-                <a:tc>
-                  <a:txBody>
-                    <a:bodyPr/>
-                    <a:lstStyle/>
-                    <a:p>
-                      <a:pPr marL="0" algn="l" defTabSz="4389120" rtl="0" eaLnBrk="1" fontAlgn="t" latinLnBrk="0" hangingPunct="1">
-                        <a:spcBef>
-                          <a:spcPts val="0"/>
-                        </a:spcBef>
-                        <a:spcAft>
-                          <a:spcPts val="0"/>
-                        </a:spcAft>
-                      </a:pPr>
-                      <a:r>
-                        <a:rPr lang="en-US" sz="2800" dirty="0">
-                          <a:effectLst/>
-                          <a:latin typeface="+mj-lt"/>
-                        </a:rPr>
-                        <a:t>Leaf mass per area</a:t>
-                      </a:r>
-                    </a:p>
-                  </a:txBody>
-                  <a:tcPr marL="57150" marR="57150" marT="19050" marB="19050">
-                    <a:lnL w="9525" cap="flat" cmpd="sng" algn="ctr">
-                      <a:solidFill>
-                        <a:srgbClr val="9E9E9E"/>
-                      </a:solidFill>
-                      <a:prstDash val="solid"/>
-                      <a:round/>
-                      <a:headEnd type="none" w="med" len="med"/>
-                      <a:tailEnd type="none" w="med" len="med"/>
-                    </a:lnL>
-                    <a:lnR w="9525" cap="flat" cmpd="sng" algn="ctr">
-                      <a:solidFill>
-                        <a:srgbClr val="9E9E9E"/>
-                      </a:solidFill>
-                      <a:prstDash val="solid"/>
-                      <a:round/>
-                      <a:headEnd type="none" w="med" len="med"/>
-                      <a:tailEnd type="none" w="med" len="med"/>
-                    </a:lnR>
-                    <a:lnT w="9525" cap="flat" cmpd="sng" algn="ctr">
-                      <a:solidFill>
-                        <a:srgbClr val="9E9E9E"/>
-                      </a:solidFill>
-                      <a:prstDash val="solid"/>
-                      <a:round/>
-                      <a:headEnd type="none" w="med" len="med"/>
-                      <a:tailEnd type="none" w="med" len="med"/>
-                    </a:lnT>
-                    <a:lnB w="9525" cap="flat" cmpd="sng" algn="ctr">
-                      <a:solidFill>
-                        <a:srgbClr val="9E9E9E"/>
-                      </a:solidFill>
-                      <a:prstDash val="solid"/>
-                      <a:round/>
-                      <a:headEnd type="none" w="med" len="med"/>
-                      <a:tailEnd type="none" w="med" len="med"/>
-                    </a:lnB>
-                  </a:tcPr>
-                </a:tc>
-                <a:extLst>
-                  <a:ext uri="{0D108BD9-81ED-4DB2-BD59-A6C34878D82A}">
-                    <a16:rowId xmlns:a16="http://schemas.microsoft.com/office/drawing/2014/main" val="1905024319"/>
-                  </a:ext>
-                </a:extLst>
-              </a:tr>
-              <a:tr h="642266">
-                <a:tc>
-                  <a:txBody>
-                    <a:bodyPr/>
-                    <a:lstStyle/>
-                    <a:p>
-                      <a:pPr rtl="0" fontAlgn="t">
-                        <a:spcBef>
-                          <a:spcPts val="0"/>
-                        </a:spcBef>
-                        <a:spcAft>
-                          <a:spcPts val="0"/>
-                        </a:spcAft>
-                      </a:pPr>
-                      <a:r>
-                        <a:rPr lang="en-US" sz="2800" b="0" i="0" u="none" strike="noStrike">
-                          <a:solidFill>
-                            <a:srgbClr val="000000"/>
-                          </a:solidFill>
-                          <a:effectLst/>
-                          <a:latin typeface="+mj-lt"/>
-                        </a:rPr>
-                        <a:t>P50</a:t>
-                      </a:r>
-                      <a:endParaRPr lang="en-US" sz="2800">
-                        <a:effectLst/>
-                        <a:latin typeface="+mj-lt"/>
-                      </a:endParaRPr>
-                    </a:p>
-                  </a:txBody>
-                  <a:tcPr marL="57150" marR="57150" marT="19050" marB="19050">
-                    <a:lnL w="9525" cap="flat" cmpd="sng" algn="ctr">
-                      <a:solidFill>
-                        <a:srgbClr val="9E9E9E"/>
-                      </a:solidFill>
-                      <a:prstDash val="solid"/>
-                      <a:round/>
-                      <a:headEnd type="none" w="med" len="med"/>
-                      <a:tailEnd type="none" w="med" len="med"/>
-                    </a:lnL>
-                    <a:lnR w="9525" cap="flat" cmpd="sng" algn="ctr">
-                      <a:solidFill>
-                        <a:srgbClr val="9E9E9E"/>
-                      </a:solidFill>
-                      <a:prstDash val="solid"/>
-                      <a:round/>
-                      <a:headEnd type="none" w="med" len="med"/>
-                      <a:tailEnd type="none" w="med" len="med"/>
-                    </a:lnR>
-                    <a:lnT w="9525" cap="flat" cmpd="sng" algn="ctr">
-                      <a:solidFill>
-                        <a:srgbClr val="9E9E9E"/>
-                      </a:solidFill>
-                      <a:prstDash val="solid"/>
-                      <a:round/>
-                      <a:headEnd type="none" w="med" len="med"/>
-                      <a:tailEnd type="none" w="med" len="med"/>
-                    </a:lnT>
-                    <a:lnB w="9525" cap="flat" cmpd="sng" algn="ctr">
-                      <a:solidFill>
-                        <a:srgbClr val="9E9E9E"/>
-                      </a:solidFill>
-                      <a:prstDash val="solid"/>
-                      <a:round/>
-                      <a:headEnd type="none" w="med" len="med"/>
-                      <a:tailEnd type="none" w="med" len="med"/>
-                    </a:lnB>
-                  </a:tcPr>
-                </a:tc>
-                <a:tc>
-                  <a:txBody>
-                    <a:bodyPr/>
-                    <a:lstStyle/>
-                    <a:p>
-                      <a:pPr marL="0" algn="l" defTabSz="4389120" rtl="0" eaLnBrk="1" fontAlgn="t" latinLnBrk="0" hangingPunct="1">
-                        <a:spcBef>
-                          <a:spcPts val="0"/>
-                        </a:spcBef>
-                        <a:spcAft>
-                          <a:spcPts val="0"/>
-                        </a:spcAft>
-                      </a:pPr>
-                      <a:r>
-                        <a:rPr lang="en-US" sz="2800" dirty="0">
-                          <a:effectLst/>
-                          <a:latin typeface="+mj-lt"/>
-                        </a:rPr>
-                        <a:t>Water potential at which 50% of conductivity is lost; indicates vulnerability to drought</a:t>
-                      </a:r>
-                    </a:p>
-                  </a:txBody>
-                  <a:tcPr marL="57150" marR="57150" marT="19050" marB="19050">
-                    <a:lnL w="9525" cap="flat" cmpd="sng" algn="ctr">
-                      <a:solidFill>
-                        <a:srgbClr val="9E9E9E"/>
-                      </a:solidFill>
-                      <a:prstDash val="solid"/>
-                      <a:round/>
-                      <a:headEnd type="none" w="med" len="med"/>
-                      <a:tailEnd type="none" w="med" len="med"/>
-                    </a:lnL>
-                    <a:lnR w="9525" cap="flat" cmpd="sng" algn="ctr">
-                      <a:solidFill>
-                        <a:srgbClr val="9E9E9E"/>
-                      </a:solidFill>
-                      <a:prstDash val="solid"/>
-                      <a:round/>
-                      <a:headEnd type="none" w="med" len="med"/>
-                      <a:tailEnd type="none" w="med" len="med"/>
-                    </a:lnR>
-                    <a:lnT w="9525" cap="flat" cmpd="sng" algn="ctr">
-                      <a:solidFill>
-                        <a:srgbClr val="9E9E9E"/>
-                      </a:solidFill>
-                      <a:prstDash val="solid"/>
-                      <a:round/>
-                      <a:headEnd type="none" w="med" len="med"/>
-                      <a:tailEnd type="none" w="med" len="med"/>
-                    </a:lnT>
-                    <a:lnB w="9525" cap="flat" cmpd="sng" algn="ctr">
-                      <a:solidFill>
-                        <a:srgbClr val="9E9E9E"/>
-                      </a:solidFill>
-                      <a:prstDash val="solid"/>
-                      <a:round/>
-                      <a:headEnd type="none" w="med" len="med"/>
-                      <a:tailEnd type="none" w="med" len="med"/>
-                    </a:lnB>
-                  </a:tcPr>
-                </a:tc>
-                <a:extLst>
-                  <a:ext uri="{0D108BD9-81ED-4DB2-BD59-A6C34878D82A}">
-                    <a16:rowId xmlns:a16="http://schemas.microsoft.com/office/drawing/2014/main" val="711089133"/>
-                  </a:ext>
-                </a:extLst>
-              </a:tr>
-              <a:tr h="642266">
-                <a:tc>
-                  <a:txBody>
-                    <a:bodyPr/>
-                    <a:lstStyle/>
-                    <a:p>
-                      <a:pPr rtl="0" fontAlgn="t">
-                        <a:spcBef>
-                          <a:spcPts val="0"/>
-                        </a:spcBef>
-                        <a:spcAft>
-                          <a:spcPts val="0"/>
-                        </a:spcAft>
-                      </a:pPr>
-                      <a:r>
-                        <a:rPr lang="en-US" sz="2800" dirty="0">
-                          <a:effectLst/>
-                          <a:latin typeface="+mj-lt"/>
-                        </a:rPr>
-                        <a:t>HSM</a:t>
-                      </a:r>
-                    </a:p>
-                  </a:txBody>
-                  <a:tcPr marL="57150" marR="57150" marT="19050" marB="19050">
-                    <a:lnL w="9525" cap="flat" cmpd="sng" algn="ctr">
-                      <a:solidFill>
-                        <a:srgbClr val="9E9E9E"/>
-                      </a:solidFill>
-                      <a:prstDash val="solid"/>
-                      <a:round/>
-                      <a:headEnd type="none" w="med" len="med"/>
-                      <a:tailEnd type="none" w="med" len="med"/>
-                    </a:lnL>
-                    <a:lnR w="9525" cap="flat" cmpd="sng" algn="ctr">
-                      <a:solidFill>
-                        <a:srgbClr val="9E9E9E"/>
-                      </a:solidFill>
-                      <a:prstDash val="solid"/>
-                      <a:round/>
-                      <a:headEnd type="none" w="med" len="med"/>
-                      <a:tailEnd type="none" w="med" len="med"/>
-                    </a:lnR>
-                    <a:lnT w="9525" cap="flat" cmpd="sng" algn="ctr">
-                      <a:solidFill>
-                        <a:srgbClr val="9E9E9E"/>
-                      </a:solidFill>
-                      <a:prstDash val="solid"/>
-                      <a:round/>
-                      <a:headEnd type="none" w="med" len="med"/>
-                      <a:tailEnd type="none" w="med" len="med"/>
-                    </a:lnT>
-                    <a:lnB w="9525" cap="flat" cmpd="sng" algn="ctr">
-                      <a:solidFill>
-                        <a:srgbClr val="9E9E9E"/>
-                      </a:solidFill>
-                      <a:prstDash val="solid"/>
-                      <a:round/>
-                      <a:headEnd type="none" w="med" len="med"/>
-                      <a:tailEnd type="none" w="med" len="med"/>
-                    </a:lnB>
-                  </a:tcPr>
-                </a:tc>
-                <a:tc>
-                  <a:txBody>
-                    <a:bodyPr/>
-                    <a:lstStyle/>
-                    <a:p>
-                      <a:pPr marL="0" algn="l" defTabSz="4389120" rtl="0" eaLnBrk="1" fontAlgn="t" latinLnBrk="0" hangingPunct="1">
-                        <a:spcBef>
-                          <a:spcPts val="0"/>
-                        </a:spcBef>
-                        <a:spcAft>
-                          <a:spcPts val="0"/>
-                        </a:spcAft>
-                      </a:pPr>
-                      <a:r>
-                        <a:rPr lang="en-US" sz="2800" dirty="0">
-                          <a:effectLst/>
-                          <a:latin typeface="+mj-lt"/>
-                        </a:rPr>
-                        <a:t>Hydraulic safety margin; difference between lowest seasonal water potentials and P50</a:t>
-                      </a:r>
-                    </a:p>
-                  </a:txBody>
-                  <a:tcPr marL="57150" marR="57150" marT="19050" marB="19050">
-                    <a:lnL w="9525" cap="flat" cmpd="sng" algn="ctr">
-                      <a:solidFill>
-                        <a:srgbClr val="9E9E9E"/>
-                      </a:solidFill>
-                      <a:prstDash val="solid"/>
-                      <a:round/>
-                      <a:headEnd type="none" w="med" len="med"/>
-                      <a:tailEnd type="none" w="med" len="med"/>
-                    </a:lnL>
-                    <a:lnR w="9525" cap="flat" cmpd="sng" algn="ctr">
-                      <a:solidFill>
-                        <a:srgbClr val="9E9E9E"/>
-                      </a:solidFill>
-                      <a:prstDash val="solid"/>
-                      <a:round/>
-                      <a:headEnd type="none" w="med" len="med"/>
-                      <a:tailEnd type="none" w="med" len="med"/>
-                    </a:lnR>
-                    <a:lnT w="9525" cap="flat" cmpd="sng" algn="ctr">
-                      <a:solidFill>
-                        <a:srgbClr val="9E9E9E"/>
-                      </a:solidFill>
-                      <a:prstDash val="solid"/>
-                      <a:round/>
-                      <a:headEnd type="none" w="med" len="med"/>
-                      <a:tailEnd type="none" w="med" len="med"/>
-                    </a:lnT>
-                    <a:lnB w="9525" cap="flat" cmpd="sng" algn="ctr">
-                      <a:solidFill>
-                        <a:srgbClr val="9E9E9E"/>
-                      </a:solidFill>
-                      <a:prstDash val="solid"/>
-                      <a:round/>
-                      <a:headEnd type="none" w="med" len="med"/>
-                      <a:tailEnd type="none" w="med" len="med"/>
-                    </a:lnB>
-                  </a:tcPr>
-                </a:tc>
-                <a:extLst>
-                  <a:ext uri="{0D108BD9-81ED-4DB2-BD59-A6C34878D82A}">
-                    <a16:rowId xmlns:a16="http://schemas.microsoft.com/office/drawing/2014/main" val="1666074750"/>
-                  </a:ext>
-                </a:extLst>
-              </a:tr>
-            </a:tbl>
-          </a:graphicData>
-        </a:graphic>
-      </p:graphicFrame>
-      <p:sp>
-        <p:nvSpPr>
-          <p:cNvPr id="49" name="TextBox 48">
-            <a:extLst>
-              <a:ext uri="{FF2B5EF4-FFF2-40B4-BE49-F238E27FC236}">
-                <a16:creationId xmlns:a16="http://schemas.microsoft.com/office/drawing/2014/main" id="{8AC91367-9250-A74B-A537-2E8EC3CF905A}"/>
-              </a:ext>
-            </a:extLst>
-          </p:cNvPr>
-          <p:cNvSpPr txBox="1"/>
-          <p:nvPr/>
-        </p:nvSpPr>
-        <p:spPr>
-          <a:xfrm>
-            <a:off x="15716953" y="17567351"/>
-            <a:ext cx="12762093" cy="3108543"/>
-          </a:xfrm>
-          <a:prstGeom prst="rect">
-            <a:avLst/>
-          </a:prstGeom>
-          <a:noFill/>
-        </p:spPr>
-        <p:txBody>
-          <a:bodyPr wrap="square" rtlCol="0">
-            <a:spAutoFit/>
-          </a:bodyPr>
-          <a:lstStyle/>
-          <a:p>
-            <a:pPr>
-              <a:spcAft>
-                <a:spcPts val="1741"/>
-              </a:spcAft>
-            </a:pPr>
-            <a:r>
-              <a:rPr lang="en-US" sz="2800" dirty="0">
-                <a:solidFill>
-                  <a:schemeClr val="bg2">
-                    <a:lumMod val="25000"/>
-                  </a:schemeClr>
-                </a:solidFill>
-                <a:latin typeface="+mj-lt"/>
-              </a:rPr>
-              <a:t>Fig. 3. Predawn and Midday water potentials measured in July 2023 (means +/- </a:t>
-            </a:r>
-            <a:r>
-              <a:rPr lang="en-US" sz="2800" dirty="0" err="1">
-                <a:solidFill>
-                  <a:schemeClr val="bg2">
-                    <a:lumMod val="25000"/>
-                  </a:schemeClr>
-                </a:solidFill>
-                <a:latin typeface="+mj-lt"/>
-              </a:rPr>
-              <a:t>sd</a:t>
-            </a:r>
-            <a:r>
-              <a:rPr lang="en-US" sz="2800" dirty="0">
-                <a:solidFill>
-                  <a:schemeClr val="bg2">
-                    <a:lumMod val="25000"/>
-                  </a:schemeClr>
-                </a:solidFill>
-                <a:latin typeface="+mj-lt"/>
-              </a:rPr>
-              <a:t>). Filled triangles indicate predawn measurements height-adjusted to ground level, and filled circles indicate midday measurements height-adjusted to top of tree (e.g. including increases in water potential due to gravity alone). Open circles indicate midday measurements of large trees adjusted to ground level, such that the difference between dark blue open and closed circles represents the effect of gravity. Significant relationships indicated in left corners (no sig. differences for PILA). </a:t>
-            </a:r>
-          </a:p>
-        </p:txBody>
-      </p:sp>
-      <p:sp>
-        <p:nvSpPr>
-          <p:cNvPr id="220" name="TextBox 219">
-            <a:extLst>
-              <a:ext uri="{FF2B5EF4-FFF2-40B4-BE49-F238E27FC236}">
-                <a16:creationId xmlns:a16="http://schemas.microsoft.com/office/drawing/2014/main" id="{E1E0103D-EDB6-C6CE-71FF-DD46F308D001}"/>
-              </a:ext>
-            </a:extLst>
-          </p:cNvPr>
-          <p:cNvSpPr txBox="1"/>
-          <p:nvPr/>
-        </p:nvSpPr>
-        <p:spPr>
-          <a:xfrm>
-            <a:off x="30522979" y="12367098"/>
-            <a:ext cx="12325931" cy="2246769"/>
-          </a:xfrm>
-          <a:prstGeom prst="rect">
-            <a:avLst/>
-          </a:prstGeom>
-          <a:noFill/>
-        </p:spPr>
-        <p:txBody>
-          <a:bodyPr wrap="square" rtlCol="0">
-            <a:spAutoFit/>
-          </a:bodyPr>
-          <a:lstStyle/>
-          <a:p>
-            <a:pPr>
-              <a:spcAft>
-                <a:spcPts val="1741"/>
-              </a:spcAft>
-            </a:pPr>
-            <a:r>
-              <a:rPr lang="en-US" sz="2800" dirty="0">
-                <a:solidFill>
-                  <a:schemeClr val="bg2">
-                    <a:lumMod val="25000"/>
-                  </a:schemeClr>
-                </a:solidFill>
-                <a:latin typeface="+mj-lt"/>
-              </a:rPr>
-              <a:t>Fig. 5. Difference in hydraulic safety margin (HSM) across large and small trees at wet and dry sites. HSM is the difference between the water potential at which 50% of xylem conductivity is lost (-MPa) and the minimum water potential measured under field conditions (midday water potential, -MPa). Larger HSMs indicate higher safety for trees (e.g. lower vulnerability to drought-induced mortality). </a:t>
-            </a:r>
-          </a:p>
-        </p:txBody>
-      </p:sp>
-      <p:pic>
-        <p:nvPicPr>
-          <p:cNvPr id="223" name="Picture 222" descr="A green and black logo&#10;&#10;Description automatically generated">
-            <a:extLst>
-              <a:ext uri="{FF2B5EF4-FFF2-40B4-BE49-F238E27FC236}">
-                <a16:creationId xmlns:a16="http://schemas.microsoft.com/office/drawing/2014/main" id="{BB3D119D-8A68-EBF1-F87F-1E89872B3A6A}"/>
+                <a16:creationId xmlns:a16="http://schemas.microsoft.com/office/drawing/2014/main" id="{29395F50-7EAC-6318-0ED0-AE6F05BD7AF3}"/>
               </a:ext>
             </a:extLst>
           </p:cNvPr>
@@ -6722,298 +4899,27 @@
           <p:nvPr/>
         </p:nvPicPr>
         <p:blipFill>
-          <a:blip r:embed="rId10">
-            <a:biLevel thresh="50000"/>
-          </a:blip>
+          <a:blip r:embed="rId4"/>
           <a:stretch>
             <a:fillRect/>
           </a:stretch>
         </p:blipFill>
         <p:spPr>
           <a:xfrm>
-            <a:off x="41638276" y="2910801"/>
-            <a:ext cx="1448954" cy="560501"/>
+            <a:off x="33059460" y="486873"/>
+            <a:ext cx="7326164" cy="3514049"/>
           </a:xfrm>
           <a:prstGeom prst="rect">
             <a:avLst/>
           </a:prstGeom>
         </p:spPr>
       </p:pic>
-      <p:sp>
-        <p:nvSpPr>
-          <p:cNvPr id="141" name="TextBox 140">
+      <p:pic>
+        <p:nvPicPr>
+          <p:cNvPr id="3" name="Picture 2">
             <a:extLst>
               <a:ext uri="{FF2B5EF4-FFF2-40B4-BE49-F238E27FC236}">
-                <a16:creationId xmlns:a16="http://schemas.microsoft.com/office/drawing/2014/main" id="{15AD9329-DCFA-2667-EEE0-05988447A873}"/>
-              </a:ext>
-            </a:extLst>
-          </p:cNvPr>
-          <p:cNvSpPr txBox="1"/>
-          <p:nvPr/>
-        </p:nvSpPr>
-        <p:spPr>
-          <a:xfrm>
-            <a:off x="29468679" y="25381221"/>
-            <a:ext cx="14902369" cy="830997"/>
-          </a:xfrm>
-          <a:prstGeom prst="rect">
-            <a:avLst/>
-          </a:prstGeom>
-          <a:noFill/>
-        </p:spPr>
-        <p:txBody>
-          <a:bodyPr wrap="square" rtlCol="0">
-            <a:spAutoFit/>
-          </a:bodyPr>
-          <a:lstStyle/>
-          <a:p>
-            <a:pPr>
-              <a:spcAft>
-                <a:spcPts val="1741"/>
-              </a:spcAft>
-            </a:pPr>
-            <a:r>
-              <a:rPr lang="en-US" sz="4800" b="1" dirty="0">
-                <a:solidFill>
-                  <a:srgbClr val="ECE7E2"/>
-                </a:solidFill>
-              </a:rPr>
-              <a:t>Conclusion/main takeaways.</a:t>
-            </a:r>
-          </a:p>
-        </p:txBody>
-      </p:sp>
-      <p:sp>
-        <p:nvSpPr>
-          <p:cNvPr id="82" name="TextBox 81">
-            <a:extLst>
-              <a:ext uri="{FF2B5EF4-FFF2-40B4-BE49-F238E27FC236}">
-                <a16:creationId xmlns:a16="http://schemas.microsoft.com/office/drawing/2014/main" id="{72321696-FCE6-3742-8D12-C5EDED447AFD}"/>
-              </a:ext>
-            </a:extLst>
-          </p:cNvPr>
-          <p:cNvSpPr txBox="1"/>
-          <p:nvPr/>
-        </p:nvSpPr>
-        <p:spPr>
-          <a:xfrm>
-            <a:off x="18424290" y="4647310"/>
-            <a:ext cx="5184404" cy="1015663"/>
-          </a:xfrm>
-          <a:prstGeom prst="rect">
-            <a:avLst/>
-          </a:prstGeom>
-          <a:noFill/>
-        </p:spPr>
-        <p:txBody>
-          <a:bodyPr wrap="square" rtlCol="0">
-            <a:spAutoFit/>
-          </a:bodyPr>
-          <a:lstStyle/>
-          <a:p>
-            <a:pPr algn="ctr">
-              <a:spcAft>
-                <a:spcPts val="1741"/>
-              </a:spcAft>
-            </a:pPr>
-            <a:r>
-              <a:rPr lang="en-US" sz="6000" b="1" dirty="0">
-                <a:solidFill>
-                  <a:schemeClr val="bg2">
-                    <a:lumMod val="25000"/>
-                  </a:schemeClr>
-                </a:solidFill>
-              </a:rPr>
-              <a:t>METHODS</a:t>
-            </a:r>
-            <a:endParaRPr lang="en-US" sz="4400" b="1" dirty="0">
-              <a:solidFill>
-                <a:schemeClr val="bg2">
-                  <a:lumMod val="25000"/>
-                </a:schemeClr>
-              </a:solidFill>
-            </a:endParaRPr>
-          </a:p>
-        </p:txBody>
-      </p:sp>
-      <p:sp>
-        <p:nvSpPr>
-          <p:cNvPr id="224" name="TextBox 223">
-            <a:extLst>
-              <a:ext uri="{FF2B5EF4-FFF2-40B4-BE49-F238E27FC236}">
-                <a16:creationId xmlns:a16="http://schemas.microsoft.com/office/drawing/2014/main" id="{D6670101-1929-ECB8-09BD-2B185AF5C2FB}"/>
-              </a:ext>
-            </a:extLst>
-          </p:cNvPr>
-          <p:cNvSpPr txBox="1"/>
-          <p:nvPr/>
-        </p:nvSpPr>
-        <p:spPr>
-          <a:xfrm>
-            <a:off x="4777808" y="15511411"/>
-            <a:ext cx="4626650" cy="9274334"/>
-          </a:xfrm>
-          <a:prstGeom prst="rect">
-            <a:avLst/>
-          </a:prstGeom>
-          <a:noFill/>
-        </p:spPr>
-        <p:txBody>
-          <a:bodyPr wrap="square" rtlCol="0">
-            <a:spAutoFit/>
-          </a:bodyPr>
-          <a:lstStyle/>
-          <a:p>
-            <a:pPr algn="ctr">
-              <a:spcAft>
-                <a:spcPts val="1741"/>
-              </a:spcAft>
-            </a:pPr>
-            <a:r>
-              <a:rPr lang="en-US" sz="6000" b="1" dirty="0">
-                <a:solidFill>
-                  <a:srgbClr val="284655"/>
-                </a:solidFill>
-              </a:rPr>
-              <a:t>Text and diagrams</a:t>
-            </a:r>
-          </a:p>
-          <a:p>
-            <a:pPr algn="ctr">
-              <a:spcAft>
-                <a:spcPts val="1741"/>
-              </a:spcAft>
-            </a:pPr>
-            <a:endParaRPr lang="en-US" sz="6000" b="1" dirty="0">
-              <a:solidFill>
-                <a:srgbClr val="284655"/>
-              </a:solidFill>
-            </a:endParaRPr>
-          </a:p>
-          <a:p>
-            <a:pPr algn="ctr">
-              <a:spcAft>
-                <a:spcPts val="1741"/>
-              </a:spcAft>
-            </a:pPr>
-            <a:r>
-              <a:rPr lang="en-US" sz="6000" b="1" dirty="0">
-                <a:solidFill>
-                  <a:srgbClr val="284655"/>
-                </a:solidFill>
-              </a:rPr>
-              <a:t>Diagram of what even is leaf angle </a:t>
-            </a:r>
-          </a:p>
-          <a:p>
-            <a:pPr algn="ctr">
-              <a:spcAft>
-                <a:spcPts val="1741"/>
-              </a:spcAft>
-            </a:pPr>
-            <a:endParaRPr lang="en-US" sz="6000" b="1" dirty="0">
-              <a:solidFill>
-                <a:srgbClr val="284655"/>
-              </a:solidFill>
-            </a:endParaRPr>
-          </a:p>
-          <a:p>
-            <a:pPr algn="ctr">
-              <a:spcAft>
-                <a:spcPts val="1741"/>
-              </a:spcAft>
-            </a:pPr>
-            <a:r>
-              <a:rPr lang="en-US" sz="6000" b="1" dirty="0">
-                <a:solidFill>
-                  <a:srgbClr val="284655"/>
-                </a:solidFill>
-              </a:rPr>
-              <a:t>Graph of hypothesis</a:t>
-            </a:r>
-          </a:p>
-        </p:txBody>
-      </p:sp>
-      <p:sp>
-        <p:nvSpPr>
-          <p:cNvPr id="239" name="TextBox 238">
-            <a:extLst>
-              <a:ext uri="{FF2B5EF4-FFF2-40B4-BE49-F238E27FC236}">
-                <a16:creationId xmlns:a16="http://schemas.microsoft.com/office/drawing/2014/main" id="{D000B35B-295E-3964-A67F-416DDF8C39DF}"/>
-              </a:ext>
-            </a:extLst>
-          </p:cNvPr>
-          <p:cNvSpPr txBox="1"/>
-          <p:nvPr/>
-        </p:nvSpPr>
-        <p:spPr>
-          <a:xfrm>
-            <a:off x="481919" y="2618958"/>
-            <a:ext cx="41703083" cy="1938992"/>
-          </a:xfrm>
-          <a:prstGeom prst="rect">
-            <a:avLst/>
-          </a:prstGeom>
-          <a:noFill/>
-        </p:spPr>
-        <p:txBody>
-          <a:bodyPr wrap="none" rtlCol="0">
-            <a:spAutoFit/>
-          </a:bodyPr>
-          <a:lstStyle/>
-          <a:p>
-            <a:r>
-              <a:rPr lang="en-US" sz="6000" b="1" dirty="0">
-                <a:solidFill>
-                  <a:srgbClr val="ECE7E2"/>
-                </a:solidFill>
-                <a:latin typeface="+mj-lt"/>
-                <a:ea typeface="Verdana" panose="020B0604030504040204" pitchFamily="34" charset="0"/>
-                <a:cs typeface="Calibri" panose="020F0502020204030204" pitchFamily="34" charset="0"/>
-              </a:rPr>
-              <a:t>Indra Boving, Travis Britton, Kelly Kerr, Anna Trugman, Leander Anderegg                                                                             UC Santa Barbara </a:t>
-            </a:r>
-          </a:p>
-          <a:p>
-            <a:endParaRPr lang="en-US" sz="6000" dirty="0"/>
-          </a:p>
-        </p:txBody>
-      </p:sp>
-      <p:pic>
-        <p:nvPicPr>
-          <p:cNvPr id="241" name="Picture 240">
-            <a:extLst>
-              <a:ext uri="{FF2B5EF4-FFF2-40B4-BE49-F238E27FC236}">
-                <a16:creationId xmlns:a16="http://schemas.microsoft.com/office/drawing/2014/main" id="{32131C94-0B43-503A-FBE1-E72ED79DB12C}"/>
-              </a:ext>
-            </a:extLst>
-          </p:cNvPr>
-          <p:cNvPicPr>
-            <a:picLocks noChangeAspect="1"/>
-          </p:cNvPicPr>
-          <p:nvPr/>
-        </p:nvPicPr>
-        <p:blipFill rotWithShape="1">
-          <a:blip r:embed="rId11"/>
-          <a:srcRect t="1679"/>
-          <a:stretch/>
-        </p:blipFill>
-        <p:spPr>
-          <a:xfrm>
-            <a:off x="14847452" y="22256794"/>
-            <a:ext cx="13011436" cy="6276660"/>
-          </a:xfrm>
-          <a:prstGeom prst="rect">
-            <a:avLst/>
-          </a:prstGeom>
-        </p:spPr>
-      </p:pic>
-      <p:pic>
-        <p:nvPicPr>
-          <p:cNvPr id="4" name="Picture 3">
-            <a:extLst>
-              <a:ext uri="{FF2B5EF4-FFF2-40B4-BE49-F238E27FC236}">
-                <a16:creationId xmlns:a16="http://schemas.microsoft.com/office/drawing/2014/main" id="{9C5267BC-FE75-962E-679D-0AFED1137317}"/>
+                <a16:creationId xmlns:a16="http://schemas.microsoft.com/office/drawing/2014/main" id="{7A4D3571-ED9D-EEBC-7B57-1586DC745F6C}"/>
               </a:ext>
             </a:extLst>
           </p:cNvPr>
@@ -7023,27 +4929,132 @@
           <p:nvPr/>
         </p:nvPicPr>
         <p:blipFill>
-          <a:blip r:embed="rId12"/>
+          <a:blip r:embed="rId5"/>
           <a:stretch>
             <a:fillRect/>
           </a:stretch>
         </p:blipFill>
         <p:spPr>
           <a:xfrm>
-            <a:off x="38862039" y="5565988"/>
-            <a:ext cx="3852145" cy="633716"/>
+            <a:off x="31045614" y="5777415"/>
+            <a:ext cx="10516181" cy="7435520"/>
           </a:xfrm>
           <a:prstGeom prst="rect">
             <a:avLst/>
           </a:prstGeom>
+          <a:ln>
+            <a:solidFill>
+              <a:schemeClr val="tx1"/>
+            </a:solidFill>
+          </a:ln>
         </p:spPr>
       </p:pic>
-      <p:sp>
-        <p:nvSpPr>
-          <p:cNvPr id="5" name="TextBox 4">
+      <p:pic>
+        <p:nvPicPr>
+          <p:cNvPr id="7" name="Picture 6">
             <a:extLst>
               <a:ext uri="{FF2B5EF4-FFF2-40B4-BE49-F238E27FC236}">
-                <a16:creationId xmlns:a16="http://schemas.microsoft.com/office/drawing/2014/main" id="{3A117F83-55FB-6F3D-DB77-3B9CBA53A7E6}"/>
+                <a16:creationId xmlns:a16="http://schemas.microsoft.com/office/drawing/2014/main" id="{18643811-F374-7419-AA01-E0CF74946019}"/>
+              </a:ext>
+            </a:extLst>
+          </p:cNvPr>
+          <p:cNvPicPr>
+            <a:picLocks noChangeAspect="1"/>
+          </p:cNvPicPr>
+          <p:nvPr/>
+        </p:nvPicPr>
+        <p:blipFill>
+          <a:blip r:embed="rId6"/>
+          <a:stretch>
+            <a:fillRect/>
+          </a:stretch>
+        </p:blipFill>
+        <p:spPr>
+          <a:xfrm>
+            <a:off x="31045611" y="14794274"/>
+            <a:ext cx="10516181" cy="7435519"/>
+          </a:xfrm>
+          <a:prstGeom prst="rect">
+            <a:avLst/>
+          </a:prstGeom>
+          <a:ln>
+            <a:solidFill>
+              <a:schemeClr val="tx1"/>
+            </a:solidFill>
+          </a:ln>
+        </p:spPr>
+      </p:pic>
+      <p:pic>
+        <p:nvPicPr>
+          <p:cNvPr id="10" name="Picture 9">
+            <a:extLst>
+              <a:ext uri="{FF2B5EF4-FFF2-40B4-BE49-F238E27FC236}">
+                <a16:creationId xmlns:a16="http://schemas.microsoft.com/office/drawing/2014/main" id="{C6850ECF-67EB-93D6-707E-0E07BC6504C1}"/>
+              </a:ext>
+            </a:extLst>
+          </p:cNvPr>
+          <p:cNvPicPr>
+            <a:picLocks noChangeAspect="1"/>
+          </p:cNvPicPr>
+          <p:nvPr/>
+        </p:nvPicPr>
+        <p:blipFill>
+          <a:blip r:embed="rId7"/>
+          <a:stretch>
+            <a:fillRect/>
+          </a:stretch>
+        </p:blipFill>
+        <p:spPr>
+          <a:xfrm>
+            <a:off x="15178444" y="22536746"/>
+            <a:ext cx="12188938" cy="8618251"/>
+          </a:xfrm>
+          <a:prstGeom prst="rect">
+            <a:avLst/>
+          </a:prstGeom>
+          <a:ln>
+            <a:solidFill>
+              <a:schemeClr val="tx1"/>
+            </a:solidFill>
+          </a:ln>
+        </p:spPr>
+      </p:pic>
+      <p:pic>
+        <p:nvPicPr>
+          <p:cNvPr id="16" name="Picture 15">
+            <a:extLst>
+              <a:ext uri="{FF2B5EF4-FFF2-40B4-BE49-F238E27FC236}">
+                <a16:creationId xmlns:a16="http://schemas.microsoft.com/office/drawing/2014/main" id="{87A0D26C-F5F5-5973-ED75-DBD5645490CD}"/>
+              </a:ext>
+            </a:extLst>
+          </p:cNvPr>
+          <p:cNvPicPr>
+            <a:picLocks noChangeAspect="1"/>
+          </p:cNvPicPr>
+          <p:nvPr/>
+        </p:nvPicPr>
+        <p:blipFill>
+          <a:blip r:embed="rId8"/>
+          <a:stretch>
+            <a:fillRect/>
+          </a:stretch>
+        </p:blipFill>
+        <p:spPr>
+          <a:xfrm>
+            <a:off x="15178444" y="15193042"/>
+            <a:ext cx="12194511" cy="6833476"/>
+          </a:xfrm>
+          <a:prstGeom prst="rect">
+            <a:avLst/>
+          </a:prstGeom>
+        </p:spPr>
+      </p:pic>
+      <p:sp>
+        <p:nvSpPr>
+          <p:cNvPr id="17" name="TextBox 16">
+            <a:extLst>
+              <a:ext uri="{FF2B5EF4-FFF2-40B4-BE49-F238E27FC236}">
+                <a16:creationId xmlns:a16="http://schemas.microsoft.com/office/drawing/2014/main" id="{31EC5854-1A6D-044E-2605-67EE36BCD43B}"/>
               </a:ext>
             </a:extLst>
           </p:cNvPr>
@@ -7052,8 +5063,8 @@
         </p:nvSpPr>
         <p:spPr>
           <a:xfrm>
-            <a:off x="32694394" y="15463953"/>
-            <a:ext cx="6366754" cy="7478970"/>
+            <a:off x="15178444" y="31276530"/>
+            <a:ext cx="12188938" cy="1015663"/>
           </a:xfrm>
           <a:prstGeom prst="rect">
             <a:avLst/>
@@ -7066,40 +5077,752 @@
           </a:bodyPr>
           <a:lstStyle/>
           <a:p>
-            <a:pPr algn="ctr">
-              <a:spcAft>
-                <a:spcPts val="1741"/>
-              </a:spcAft>
+            <a:r>
+              <a:rPr lang="en-US" sz="3000" dirty="0"/>
+              <a:t>Figure 1. Water potential for coast live oaks, </a:t>
+            </a:r>
+            <a:r>
+              <a:rPr lang="en-US" sz="3000" i="1" dirty="0"/>
+              <a:t>Quercus </a:t>
+            </a:r>
+            <a:r>
+              <a:rPr lang="en-US" sz="3000" i="1" dirty="0" err="1"/>
+              <a:t>agrifolia</a:t>
+            </a:r>
+            <a:r>
+              <a:rPr lang="en-US" sz="3000" dirty="0"/>
+              <a:t>, and blue oaks, </a:t>
+            </a:r>
+            <a:r>
+              <a:rPr lang="en-US" sz="3000" i="1" dirty="0"/>
+              <a:t>Quercus </a:t>
+            </a:r>
+            <a:r>
+              <a:rPr lang="en-US" sz="3000" i="1" dirty="0" err="1"/>
+              <a:t>douglasii</a:t>
+            </a:r>
+            <a:r>
+              <a:rPr lang="en-US" sz="3000" dirty="0"/>
+              <a:t>, at different times of the day for three years. </a:t>
+            </a:r>
+          </a:p>
+        </p:txBody>
+      </p:sp>
+      <p:sp>
+        <p:nvSpPr>
+          <p:cNvPr id="19" name="TextBox 18">
+            <a:extLst>
+              <a:ext uri="{FF2B5EF4-FFF2-40B4-BE49-F238E27FC236}">
+                <a16:creationId xmlns:a16="http://schemas.microsoft.com/office/drawing/2014/main" id="{12E474CA-C72E-E684-CA3F-8203346DBD02}"/>
+              </a:ext>
+            </a:extLst>
+          </p:cNvPr>
+          <p:cNvSpPr txBox="1"/>
+          <p:nvPr/>
+        </p:nvSpPr>
+        <p:spPr>
+          <a:xfrm>
+            <a:off x="31045612" y="13365274"/>
+            <a:ext cx="10516181" cy="1015663"/>
+          </a:xfrm>
+          <a:prstGeom prst="rect">
+            <a:avLst/>
+          </a:prstGeom>
+          <a:noFill/>
+        </p:spPr>
+        <p:txBody>
+          <a:bodyPr wrap="square" rtlCol="0">
+            <a:spAutoFit/>
+          </a:bodyPr>
+          <a:lstStyle/>
+          <a:p>
+            <a:r>
+              <a:rPr lang="en-US" sz="3000" dirty="0">
+                <a:cs typeface="Calibri" panose="020F0502020204030204" pitchFamily="34" charset="0"/>
+              </a:rPr>
+              <a:t>Figure 2. Average leaf angles between </a:t>
+            </a:r>
+            <a:r>
+              <a:rPr lang="en-US" sz="3000" dirty="0"/>
+              <a:t>coast live oaks, </a:t>
+            </a:r>
+            <a:r>
+              <a:rPr lang="en-US" sz="3000" i="1" dirty="0"/>
+              <a:t>Quercus </a:t>
+            </a:r>
+            <a:r>
+              <a:rPr lang="en-US" sz="3000" i="1" dirty="0" err="1"/>
+              <a:t>agrifolia</a:t>
+            </a:r>
+            <a:r>
+              <a:rPr lang="en-US" sz="3000" dirty="0"/>
+              <a:t>, and blue oaks, </a:t>
+            </a:r>
+            <a:r>
+              <a:rPr lang="en-US" sz="3000" i="1" dirty="0"/>
+              <a:t>Quercus </a:t>
+            </a:r>
+            <a:r>
+              <a:rPr lang="en-US" sz="3000" i="1" dirty="0" err="1"/>
+              <a:t>douglasii</a:t>
+            </a:r>
+            <a:r>
+              <a:rPr lang="en-US" sz="3000" dirty="0">
+                <a:cs typeface="Calibri" panose="020F0502020204030204" pitchFamily="34" charset="0"/>
+              </a:rPr>
+              <a:t>.</a:t>
+            </a:r>
+          </a:p>
+        </p:txBody>
+      </p:sp>
+      <p:sp>
+        <p:nvSpPr>
+          <p:cNvPr id="22" name="TextBox 21">
+            <a:extLst>
+              <a:ext uri="{FF2B5EF4-FFF2-40B4-BE49-F238E27FC236}">
+                <a16:creationId xmlns:a16="http://schemas.microsoft.com/office/drawing/2014/main" id="{9F2A3A2D-2C61-2199-80C3-9BBD363AF146}"/>
+              </a:ext>
+            </a:extLst>
+          </p:cNvPr>
+          <p:cNvSpPr txBox="1"/>
+          <p:nvPr/>
+        </p:nvSpPr>
+        <p:spPr>
+          <a:xfrm>
+            <a:off x="31045611" y="22333804"/>
+            <a:ext cx="10516181" cy="1477328"/>
+          </a:xfrm>
+          <a:prstGeom prst="rect">
+            <a:avLst/>
+          </a:prstGeom>
+          <a:noFill/>
+        </p:spPr>
+        <p:txBody>
+          <a:bodyPr wrap="square" rtlCol="0">
+            <a:spAutoFit/>
+          </a:bodyPr>
+          <a:lstStyle/>
+          <a:p>
+            <a:r>
+              <a:rPr lang="en-US" sz="3000" dirty="0">
+                <a:cs typeface="Calibri" panose="020F0502020204030204" pitchFamily="34" charset="0"/>
+              </a:rPr>
+              <a:t>Figure 2. Average water potential at predawn in comparison to average leaf angles for </a:t>
+            </a:r>
+            <a:r>
+              <a:rPr lang="en-US" sz="3000" dirty="0"/>
+              <a:t>coast live oaks, </a:t>
+            </a:r>
+            <a:r>
+              <a:rPr lang="en-US" sz="3000" i="1" dirty="0"/>
+              <a:t>Quercus </a:t>
+            </a:r>
+            <a:r>
+              <a:rPr lang="en-US" sz="3000" i="1" dirty="0" err="1"/>
+              <a:t>agrifolia</a:t>
+            </a:r>
+            <a:r>
+              <a:rPr lang="en-US" sz="3000" dirty="0"/>
+              <a:t>, and blue oaks, </a:t>
+            </a:r>
+            <a:r>
+              <a:rPr lang="en-US" sz="3000" i="1" dirty="0"/>
+              <a:t>Quercus </a:t>
+            </a:r>
+            <a:r>
+              <a:rPr lang="en-US" sz="3000" i="1" dirty="0" err="1"/>
+              <a:t>douglasii</a:t>
+            </a:r>
+            <a:r>
+              <a:rPr lang="en-US" sz="3000" dirty="0">
+                <a:cs typeface="Calibri" panose="020F0502020204030204" pitchFamily="34" charset="0"/>
+              </a:rPr>
+              <a:t>..</a:t>
+            </a:r>
+          </a:p>
+        </p:txBody>
+      </p:sp>
+      <p:sp>
+        <p:nvSpPr>
+          <p:cNvPr id="4" name="TextBox 3">
+            <a:extLst>
+              <a:ext uri="{FF2B5EF4-FFF2-40B4-BE49-F238E27FC236}">
+                <a16:creationId xmlns:a16="http://schemas.microsoft.com/office/drawing/2014/main" id="{14FE1C01-6755-9071-3D49-4AFA60431A7F}"/>
+              </a:ext>
+            </a:extLst>
+          </p:cNvPr>
+          <p:cNvSpPr txBox="1"/>
+          <p:nvPr/>
+        </p:nvSpPr>
+        <p:spPr>
+          <a:xfrm>
+            <a:off x="29147669" y="25345720"/>
+            <a:ext cx="14428519" cy="4247317"/>
+          </a:xfrm>
+          <a:prstGeom prst="rect">
+            <a:avLst/>
+          </a:prstGeom>
+          <a:noFill/>
+        </p:spPr>
+        <p:txBody>
+          <a:bodyPr wrap="square" rtlCol="0">
+            <a:spAutoFit/>
+          </a:bodyPr>
+          <a:lstStyle/>
+          <a:p>
+            <a:pPr marL="685800" indent="-685800">
+              <a:buFont typeface="Arial" panose="020B0604020202020204" pitchFamily="34" charset="0"/>
+              <a:buChar char="•"/>
             </a:pPr>
             <a:r>
-              <a:rPr lang="en-US" sz="6000" b="1" dirty="0">
+              <a:rPr lang="en-US" sz="4500" dirty="0">
                 <a:solidFill>
-                  <a:srgbClr val="284655"/>
+                  <a:schemeClr val="bg1"/>
                 </a:solidFill>
               </a:rPr>
-              <a:t>End of summer predawn vs. leaf angle for the day that has the strongest (highest R2 and/or P-value) scatterplot of </a:t>
-            </a:r>
-            <a:r>
-              <a:rPr lang="en-US" sz="6000" b="1" dirty="0" err="1">
+              <a:t>No relationship between leaf angle and drought stress </a:t>
+            </a:r>
+          </a:p>
+          <a:p>
+            <a:pPr marL="685800" indent="-685800">
+              <a:buFont typeface="Arial" panose="020B0604020202020204" pitchFamily="34" charset="0"/>
+              <a:buChar char="•"/>
+            </a:pPr>
+            <a:r>
+              <a:rPr lang="en-US" sz="4500" dirty="0">
                 <a:solidFill>
-                  <a:srgbClr val="284655"/>
+                  <a:schemeClr val="bg1"/>
                 </a:solidFill>
               </a:rPr>
-              <a:t>thw</a:t>
-            </a:r>
-            <a:r>
-              <a:rPr lang="en-US" sz="6000" b="1" dirty="0">
+              <a:t>Blue oaks show greater drought stress in comparison to coast live oaks for July in all three years</a:t>
+            </a:r>
+          </a:p>
+          <a:p>
+            <a:pPr marL="685800" indent="-685800">
+              <a:buFont typeface="Arial" panose="020B0604020202020204" pitchFamily="34" charset="0"/>
+              <a:buChar char="•"/>
+            </a:pPr>
+            <a:r>
+              <a:rPr lang="en-US" sz="4500" dirty="0">
                 <a:solidFill>
-                  <a:srgbClr val="284655"/>
+                  <a:schemeClr val="bg1"/>
                 </a:solidFill>
               </a:rPr>
-              <a:t> two species</a:t>
-            </a:r>
-            <a:endParaRPr lang="en-US" sz="4400" b="1" dirty="0">
-              <a:solidFill>
-                <a:srgbClr val="284655"/>
-              </a:solidFill>
-            </a:endParaRPr>
+              <a:t>High variability in leaf angle for each individual tree</a:t>
+            </a:r>
+          </a:p>
+          <a:p>
+            <a:pPr marL="685800" indent="-685800">
+              <a:buFont typeface="Arial" panose="020B0604020202020204" pitchFamily="34" charset="0"/>
+              <a:buChar char="•"/>
+            </a:pPr>
+            <a:r>
+              <a:rPr lang="en-US" sz="4500" dirty="0">
+                <a:solidFill>
+                  <a:schemeClr val="bg1"/>
+                </a:solidFill>
+              </a:rPr>
+              <a:t>Need more data collection and samples of leaf angle </a:t>
+            </a:r>
+          </a:p>
+          <a:p>
+            <a:pPr marL="685800" indent="-685800">
+              <a:buFont typeface="Arial" panose="020B0604020202020204" pitchFamily="34" charset="0"/>
+              <a:buChar char="•"/>
+            </a:pPr>
+            <a:r>
+              <a:rPr lang="en-US" sz="4500" dirty="0">
+                <a:solidFill>
+                  <a:schemeClr val="bg1"/>
+                </a:solidFill>
+              </a:rPr>
+              <a:t>Direct vs. indirect methods for measuring leaf angle </a:t>
+            </a:r>
+          </a:p>
+        </p:txBody>
+      </p:sp>
+      <p:sp>
+        <p:nvSpPr>
+          <p:cNvPr id="12" name="TextBox 11">
+            <a:extLst>
+              <a:ext uri="{FF2B5EF4-FFF2-40B4-BE49-F238E27FC236}">
+                <a16:creationId xmlns:a16="http://schemas.microsoft.com/office/drawing/2014/main" id="{2E75DD37-A2F6-2FB6-5568-2CA554151956}"/>
+              </a:ext>
+            </a:extLst>
+          </p:cNvPr>
+          <p:cNvSpPr txBox="1"/>
+          <p:nvPr/>
+        </p:nvSpPr>
+        <p:spPr>
+          <a:xfrm>
+            <a:off x="28963286" y="30114691"/>
+            <a:ext cx="14612901" cy="2569934"/>
+          </a:xfrm>
+          <a:prstGeom prst="rect">
+            <a:avLst/>
+          </a:prstGeom>
+          <a:noFill/>
+        </p:spPr>
+        <p:txBody>
+          <a:bodyPr wrap="square" rtlCol="0">
+            <a:spAutoFit/>
+          </a:bodyPr>
+          <a:lstStyle/>
+          <a:p>
+            <a:r>
+              <a:rPr lang="en-US" sz="2300" dirty="0"/>
+              <a:t>1. Holder, C. D. (2012). The relationship between leaf hydrophobicity, water droplet retention, and leaf angle of common species in a semi-arid region of the western United States. </a:t>
+            </a:r>
+            <a:r>
+              <a:rPr lang="en-US" sz="2300" i="1" dirty="0"/>
+              <a:t>Agricultural and Forest Meteorology</a:t>
+            </a:r>
+            <a:r>
+              <a:rPr lang="en-US" sz="2300" dirty="0"/>
+              <a:t>, </a:t>
+            </a:r>
+            <a:r>
+              <a:rPr lang="en-US" sz="2300" i="1" dirty="0"/>
+              <a:t>152</a:t>
+            </a:r>
+            <a:r>
+              <a:rPr lang="en-US" sz="2300" dirty="0"/>
+              <a:t>(1), 11–16. https://</a:t>
+            </a:r>
+            <a:r>
+              <a:rPr lang="en-US" sz="2300" dirty="0" err="1"/>
+              <a:t>doi.org</a:t>
+            </a:r>
+            <a:r>
+              <a:rPr lang="en-US" sz="2300" dirty="0"/>
+              <a:t>/10.1016/j.agrformet.2011.08.005</a:t>
+            </a:r>
+          </a:p>
+          <a:p>
+            <a:r>
+              <a:rPr lang="en-US" sz="2300" dirty="0"/>
+              <a:t>2. Li, S., Fang, H., &amp; Zhang, Y. (2023). Determination of the Leaf Inclination Angle (LIA) through Field and Remote Sensing Methods: Current Status and Future Prospects. </a:t>
+            </a:r>
+            <a:r>
+              <a:rPr lang="en-US" sz="2300" i="1" dirty="0"/>
+              <a:t>Remote Sensing</a:t>
+            </a:r>
+            <a:r>
+              <a:rPr lang="en-US" sz="2300" dirty="0"/>
+              <a:t>, </a:t>
+            </a:r>
+            <a:r>
+              <a:rPr lang="en-US" sz="2300" i="1" dirty="0"/>
+              <a:t>15</a:t>
+            </a:r>
+            <a:r>
+              <a:rPr lang="en-US" sz="2300" dirty="0"/>
+              <a:t>(4), 946. https://</a:t>
+            </a:r>
+            <a:r>
+              <a:rPr lang="en-US" sz="2300" dirty="0" err="1"/>
+              <a:t>doi.org</a:t>
+            </a:r>
+            <a:r>
+              <a:rPr lang="en-US" sz="2300" dirty="0"/>
+              <a:t>/10.3390/rs15040946</a:t>
+            </a:r>
+          </a:p>
+          <a:p>
+            <a:r>
+              <a:rPr lang="en-US" sz="2300" dirty="0"/>
+              <a:t>3. McNeil, B. E., </a:t>
+            </a:r>
+            <a:r>
+              <a:rPr lang="en-US" sz="2300" dirty="0" err="1"/>
+              <a:t>Písek</a:t>
+            </a:r>
+            <a:r>
+              <a:rPr lang="en-US" sz="2300" dirty="0"/>
+              <a:t>, J., Harald Lepisk, &amp; Flamenco, E. A. (2016). Measuring leaf angle distribution in broadleaf canopies using UAVs. </a:t>
+            </a:r>
+            <a:r>
+              <a:rPr lang="en-US" sz="2300" i="1" dirty="0"/>
+              <a:t>Agricultural and Forest Meteorology</a:t>
+            </a:r>
+            <a:r>
+              <a:rPr lang="en-US" sz="2300" dirty="0"/>
+              <a:t>, </a:t>
+            </a:r>
+            <a:r>
+              <a:rPr lang="en-US" sz="2300" i="1" dirty="0"/>
+              <a:t>218-219</a:t>
+            </a:r>
+            <a:r>
+              <a:rPr lang="en-US" sz="2300" dirty="0"/>
+              <a:t>, 204–208. https://</a:t>
+            </a:r>
+            <a:r>
+              <a:rPr lang="en-US" sz="2300" dirty="0" err="1"/>
+              <a:t>doi.org</a:t>
+            </a:r>
+            <a:r>
+              <a:rPr lang="en-US" sz="2300" dirty="0"/>
+              <a:t>/10.1016/j.agrformet.2015.12.058</a:t>
+            </a:r>
+          </a:p>
+        </p:txBody>
+      </p:sp>
+      <p:sp>
+        <p:nvSpPr>
+          <p:cNvPr id="14" name="TextBox 13">
+            <a:extLst>
+              <a:ext uri="{FF2B5EF4-FFF2-40B4-BE49-F238E27FC236}">
+                <a16:creationId xmlns:a16="http://schemas.microsoft.com/office/drawing/2014/main" id="{11740396-11FD-3966-9AE2-72DC82C78FFA}"/>
+              </a:ext>
+            </a:extLst>
+          </p:cNvPr>
+          <p:cNvSpPr txBox="1"/>
+          <p:nvPr/>
+        </p:nvSpPr>
+        <p:spPr>
+          <a:xfrm>
+            <a:off x="531584" y="5588017"/>
+            <a:ext cx="12843768" cy="7017306"/>
+          </a:xfrm>
+          <a:prstGeom prst="rect">
+            <a:avLst/>
+          </a:prstGeom>
+          <a:noFill/>
+        </p:spPr>
+        <p:txBody>
+          <a:bodyPr wrap="square" rtlCol="0">
+            <a:spAutoFit/>
+          </a:bodyPr>
+          <a:lstStyle/>
+          <a:p>
+            <a:pPr marL="685800" indent="-685800">
+              <a:buFont typeface="Arial" panose="020B0604020202020204" pitchFamily="34" charset="0"/>
+              <a:buChar char="•"/>
+            </a:pPr>
+            <a:r>
+              <a:rPr lang="en-US" sz="4500" dirty="0"/>
+              <a:t>Climate change has led to rising temperatures and more severe droughts in California </a:t>
+            </a:r>
+          </a:p>
+          <a:p>
+            <a:pPr marL="685800" indent="-685800">
+              <a:buFont typeface="Arial" panose="020B0604020202020204" pitchFamily="34" charset="0"/>
+              <a:buChar char="•"/>
+            </a:pPr>
+            <a:r>
+              <a:rPr lang="en-US" sz="4500" dirty="0"/>
+              <a:t>Native oak species are prevalent in California’s woodlands, where they have had to develop responses to new stressors </a:t>
+            </a:r>
+          </a:p>
+          <a:p>
+            <a:pPr marL="685800" indent="-685800">
+              <a:buFont typeface="Arial" panose="020B0604020202020204" pitchFamily="34" charset="0"/>
+              <a:buChar char="•"/>
+            </a:pPr>
+            <a:r>
+              <a:rPr lang="en-US" sz="4500" dirty="0"/>
+              <a:t>Leaf angle is important In hot and dry climates</a:t>
+            </a:r>
+          </a:p>
+          <a:p>
+            <a:pPr marL="685800" indent="-685800">
+              <a:buFont typeface="Arial" panose="020B0604020202020204" pitchFamily="34" charset="0"/>
+              <a:buChar char="•"/>
+            </a:pPr>
+            <a:r>
+              <a:rPr lang="en-US" sz="4500" dirty="0"/>
+              <a:t>Leaf angle adjustment in oak species may be a response to high drought stress conditions</a:t>
+            </a:r>
+          </a:p>
+          <a:p>
+            <a:pPr marL="685800" indent="-685800">
+              <a:buFont typeface="Arial" panose="020B0604020202020204" pitchFamily="34" charset="0"/>
+              <a:buChar char="•"/>
+            </a:pPr>
+            <a:endParaRPr lang="en-US" sz="4500" dirty="0"/>
+          </a:p>
+          <a:p>
+            <a:pPr marL="685800" indent="-685800">
+              <a:buFont typeface="Arial" panose="020B0604020202020204" pitchFamily="34" charset="0"/>
+              <a:buChar char="•"/>
+            </a:pPr>
+            <a:endParaRPr lang="en-US" sz="4500" dirty="0"/>
+          </a:p>
+        </p:txBody>
+      </p:sp>
+      <p:sp>
+        <p:nvSpPr>
+          <p:cNvPr id="15" name="TextBox 14">
+            <a:extLst>
+              <a:ext uri="{FF2B5EF4-FFF2-40B4-BE49-F238E27FC236}">
+                <a16:creationId xmlns:a16="http://schemas.microsoft.com/office/drawing/2014/main" id="{7350A538-FDF3-2076-C995-F480D14A5250}"/>
+              </a:ext>
+            </a:extLst>
+          </p:cNvPr>
+          <p:cNvSpPr txBox="1"/>
+          <p:nvPr/>
+        </p:nvSpPr>
+        <p:spPr>
+          <a:xfrm>
+            <a:off x="14063050" y="5588017"/>
+            <a:ext cx="14419726" cy="9094797"/>
+          </a:xfrm>
+          <a:prstGeom prst="rect">
+            <a:avLst/>
+          </a:prstGeom>
+          <a:noFill/>
+        </p:spPr>
+        <p:txBody>
+          <a:bodyPr wrap="square" rtlCol="0">
+            <a:spAutoFit/>
+          </a:bodyPr>
+          <a:lstStyle/>
+          <a:p>
+            <a:pPr marL="685800" indent="-685800">
+              <a:buFont typeface="Arial" panose="020B0604020202020204" pitchFamily="34" charset="0"/>
+              <a:buChar char="•"/>
+            </a:pPr>
+            <a:r>
+              <a:rPr lang="en-US" sz="4500" dirty="0"/>
+              <a:t>Gathered data from 20 coast live oaks, </a:t>
+            </a:r>
+            <a:r>
+              <a:rPr lang="en-US" sz="4500" i="1" dirty="0"/>
+              <a:t>Quercus </a:t>
+            </a:r>
+            <a:r>
+              <a:rPr lang="en-US" sz="4500" i="1" dirty="0" err="1"/>
+              <a:t>agrifolia</a:t>
+            </a:r>
+            <a:r>
+              <a:rPr lang="en-US" sz="4500" dirty="0"/>
+              <a:t>, and blue oaks, </a:t>
+            </a:r>
+            <a:r>
+              <a:rPr lang="en-US" sz="4500" i="1" dirty="0"/>
+              <a:t>Quercus </a:t>
+            </a:r>
+            <a:r>
+              <a:rPr lang="en-US" sz="4500" i="1" dirty="0" err="1"/>
+              <a:t>douglasii</a:t>
+            </a:r>
+            <a:r>
+              <a:rPr lang="en-US" sz="4500" dirty="0"/>
+              <a:t>, total</a:t>
+            </a:r>
+            <a:endParaRPr lang="en-US" sz="4500" i="1" dirty="0"/>
+          </a:p>
+          <a:p>
+            <a:pPr marL="685800" indent="-685800">
+              <a:buFont typeface="Arial" panose="020B0604020202020204" pitchFamily="34" charset="0"/>
+              <a:buChar char="•"/>
+            </a:pPr>
+            <a:r>
+              <a:rPr lang="en-US" sz="4500" dirty="0"/>
+              <a:t>Selected 2 images/tree and measured 10 leaves/image</a:t>
+            </a:r>
+          </a:p>
+          <a:p>
+            <a:pPr marL="685800" indent="-685800">
+              <a:buFont typeface="Arial" panose="020B0604020202020204" pitchFamily="34" charset="0"/>
+              <a:buChar char="•"/>
+            </a:pPr>
+            <a:r>
+              <a:rPr lang="en-US" sz="4500" dirty="0"/>
+              <a:t>Recorded azimuth, pitch, and angle of photo taken given </a:t>
+            </a:r>
+          </a:p>
+          <a:p>
+            <a:pPr marL="685800" indent="-685800">
+              <a:buFont typeface="Arial" panose="020B0604020202020204" pitchFamily="34" charset="0"/>
+              <a:buChar char="•"/>
+            </a:pPr>
+            <a:r>
+              <a:rPr lang="en-US" sz="4500" dirty="0"/>
+              <a:t>Used </a:t>
+            </a:r>
+            <a:r>
+              <a:rPr lang="en-US" sz="4500" dirty="0" err="1"/>
+              <a:t>imageJ</a:t>
+            </a:r>
+            <a:r>
+              <a:rPr lang="en-US" sz="4500" dirty="0"/>
+              <a:t> to measure angle related to straight line (leaf angle) for each of the 10 leaf samples per image</a:t>
+            </a:r>
+          </a:p>
+          <a:p>
+            <a:pPr marL="685800" indent="-685800">
+              <a:buFont typeface="Arial" panose="020B0604020202020204" pitchFamily="34" charset="0"/>
+              <a:buChar char="•"/>
+            </a:pPr>
+            <a:r>
+              <a:rPr lang="en-US" sz="4500" dirty="0"/>
+              <a:t>Analyzed average leaf angle between species by creating boxplot figure on RStudio</a:t>
+            </a:r>
+          </a:p>
+          <a:p>
+            <a:pPr marL="685800" indent="-685800">
+              <a:buFont typeface="Arial" panose="020B0604020202020204" pitchFamily="34" charset="0"/>
+              <a:buChar char="•"/>
+            </a:pPr>
+            <a:r>
+              <a:rPr lang="en-US" sz="4500" dirty="0"/>
+              <a:t>Developed boxplots for average water potential of oaks based on driest month (July) for three years (2022, 23, 25)</a:t>
+            </a:r>
+          </a:p>
+          <a:p>
+            <a:pPr marL="685800" indent="-685800">
+              <a:buFont typeface="Arial" panose="020B0604020202020204" pitchFamily="34" charset="0"/>
+              <a:buChar char="•"/>
+            </a:pPr>
+            <a:r>
+              <a:rPr lang="en-US" sz="4500" dirty="0"/>
+              <a:t>Combined leaf angle and water potential data</a:t>
+            </a:r>
+          </a:p>
+          <a:p>
+            <a:pPr marL="685800" indent="-685800">
+              <a:buFont typeface="Arial" panose="020B0604020202020204" pitchFamily="34" charset="0"/>
+              <a:buChar char="•"/>
+            </a:pPr>
+            <a:r>
+              <a:rPr lang="en-US" sz="4500" dirty="0"/>
+              <a:t>Compared average water potential (x) to average leaf angle (y) based on time of day (predawn vs. midday)</a:t>
+            </a:r>
+          </a:p>
+        </p:txBody>
+      </p:sp>
+      <p:pic>
+        <p:nvPicPr>
+          <p:cNvPr id="20" name="Picture 19">
+            <a:extLst>
+              <a:ext uri="{FF2B5EF4-FFF2-40B4-BE49-F238E27FC236}">
+                <a16:creationId xmlns:a16="http://schemas.microsoft.com/office/drawing/2014/main" id="{FCBD82AC-4252-3F6E-0A64-CBD7EA801B98}"/>
+              </a:ext>
+            </a:extLst>
+          </p:cNvPr>
+          <p:cNvPicPr>
+            <a:picLocks noChangeAspect="1"/>
+          </p:cNvPicPr>
+          <p:nvPr/>
+        </p:nvPicPr>
+        <p:blipFill>
+          <a:blip r:embed="rId9"/>
+          <a:stretch>
+            <a:fillRect/>
+          </a:stretch>
+        </p:blipFill>
+        <p:spPr>
+          <a:xfrm>
+            <a:off x="1087056" y="22333804"/>
+            <a:ext cx="11619964" cy="7017306"/>
+          </a:xfrm>
+          <a:prstGeom prst="rect">
+            <a:avLst/>
+          </a:prstGeom>
+          <a:ln>
+            <a:noFill/>
+          </a:ln>
+        </p:spPr>
+      </p:pic>
+      <p:sp>
+        <p:nvSpPr>
+          <p:cNvPr id="21" name="TextBox 20">
+            <a:extLst>
+              <a:ext uri="{FF2B5EF4-FFF2-40B4-BE49-F238E27FC236}">
+                <a16:creationId xmlns:a16="http://schemas.microsoft.com/office/drawing/2014/main" id="{3BB2FEA0-D34F-9ECC-BAE8-BC3AD4E2596B}"/>
+              </a:ext>
+            </a:extLst>
+          </p:cNvPr>
+          <p:cNvSpPr txBox="1"/>
+          <p:nvPr/>
+        </p:nvSpPr>
+        <p:spPr>
+          <a:xfrm>
+            <a:off x="531584" y="29514864"/>
+            <a:ext cx="12843768" cy="2862322"/>
+          </a:xfrm>
+          <a:prstGeom prst="rect">
+            <a:avLst/>
+          </a:prstGeom>
+          <a:noFill/>
+        </p:spPr>
+        <p:txBody>
+          <a:bodyPr wrap="square" rtlCol="0">
+            <a:spAutoFit/>
+          </a:bodyPr>
+          <a:lstStyle/>
+          <a:p>
+            <a:r>
+              <a:rPr lang="en-US" sz="4500" dirty="0"/>
+              <a:t>Does lower mean water potential indicate a lower or higher mean leaf angle response, if at all?  Is there any variation between mean leaf angle of the two oak species in similar conditions?</a:t>
+            </a:r>
+          </a:p>
+        </p:txBody>
+      </p:sp>
+      <p:pic>
+        <p:nvPicPr>
+          <p:cNvPr id="5" name="Picture 4">
+            <a:extLst>
+              <a:ext uri="{FF2B5EF4-FFF2-40B4-BE49-F238E27FC236}">
+                <a16:creationId xmlns:a16="http://schemas.microsoft.com/office/drawing/2014/main" id="{115960E7-727F-C2F2-1D84-BC4B996983BD}"/>
+              </a:ext>
+            </a:extLst>
+          </p:cNvPr>
+          <p:cNvPicPr>
+            <a:picLocks noChangeAspect="1"/>
+          </p:cNvPicPr>
+          <p:nvPr/>
+        </p:nvPicPr>
+        <p:blipFill>
+          <a:blip r:embed="rId10"/>
+          <a:stretch>
+            <a:fillRect/>
+          </a:stretch>
+        </p:blipFill>
+        <p:spPr>
+          <a:xfrm>
+            <a:off x="3067268" y="12889978"/>
+            <a:ext cx="7772400" cy="8063345"/>
+          </a:xfrm>
+          <a:prstGeom prst="rect">
+            <a:avLst/>
+          </a:prstGeom>
+        </p:spPr>
+      </p:pic>
+      <p:sp>
+        <p:nvSpPr>
+          <p:cNvPr id="8" name="TextBox 7">
+            <a:extLst>
+              <a:ext uri="{FF2B5EF4-FFF2-40B4-BE49-F238E27FC236}">
+                <a16:creationId xmlns:a16="http://schemas.microsoft.com/office/drawing/2014/main" id="{FF96D180-1770-B41E-2D44-6A6202F0AF16}"/>
+              </a:ext>
+            </a:extLst>
+          </p:cNvPr>
+          <p:cNvSpPr txBox="1"/>
+          <p:nvPr/>
+        </p:nvSpPr>
+        <p:spPr>
+          <a:xfrm>
+            <a:off x="633715" y="21132273"/>
+            <a:ext cx="13083598" cy="784352"/>
+          </a:xfrm>
+          <a:prstGeom prst="rect">
+            <a:avLst/>
+          </a:prstGeom>
+          <a:noFill/>
+        </p:spPr>
+        <p:txBody>
+          <a:bodyPr wrap="square" rtlCol="0">
+            <a:spAutoFit/>
+          </a:bodyPr>
+          <a:lstStyle/>
+          <a:p>
+            <a:r>
+              <a:rPr lang="en-US" sz="4500" dirty="0"/>
+              <a:t>What are different methods to measuring leaf angle?</a:t>
+            </a:r>
           </a:p>
         </p:txBody>
       </p:sp>
